--- a/it/slides/11-Architettura_dei_Calcolatori-Macchine_Combinatorie.pptx
+++ b/it/slides/11-Architettura_dei_Calcolatori-Macchine_Combinatorie.pptx
@@ -126,26 +126,26 @@
   <p:extLst>
     <p:ext uri="{521415D9-36F7-43E2-AB2F-B90AF26B5E84}">
       <p14:sectionLst xmlns:p14="http://schemas.microsoft.com/office/powerpoint/2010/main">
-        <p14:section name="Apertura" id="{a4ee54d3-61e7-9b10-7fa6-d2a754c5cc7d}">
+        <p14:section name="Apertura" id="{c5287129-bb78-ed25-2b49-c0645655cf8e}">
           <p14:sldIdLst>
             <p14:sldId id="256"/>
             <p14:sldId id="257"/>
           </p14:sldIdLst>
         </p14:section>
-        <p14:section name="Macchine combinatorie" id="{ca7b1494-7650-7622-b0b2-8e12fbbdbe57}">
+        <p14:section name="Macchine combinatorie" id="{685ba264-9c4c-bfdc-4464-0e120fe924e1}">
           <p14:sldIdLst>
             <p14:sldId id="258"/>
             <p14:sldId id="259"/>
           </p14:sldIdLst>
         </p14:section>
-        <p14:section name="Codici" id="{f4a5a2ae-bde0-d827-6874-b830a7ebccd1}">
+        <p14:section name="Codici" id="{d47b5a72-e4cf-799a-814d-e5e309561ee0}">
           <p14:sldIdLst>
             <p14:sldId id="260"/>
             <p14:sldId id="261"/>
             <p14:sldId id="262"/>
           </p14:sldIdLst>
         </p14:section>
-        <p14:section name="Decodificatori e codificatori" id="{6e854b20-cb7d-9fc3-ed0e-62ea66ba278a}">
+        <p14:section name="Decodificatori e codificatori" id="{6bcc12f1-910a-ad8d-eea3-91ebb55ab3f2}">
           <p14:sldIdLst>
             <p14:sldId id="263"/>
             <p14:sldId id="264"/>
@@ -153,19 +153,19 @@
             <p14:sldId id="266"/>
           </p14:sldIdLst>
         </p14:section>
-        <p14:section name="Multiplexer e demultiplexer" id="{0a195b94-0aa3-cbb2-060e-6cab7e6d69f5}">
+        <p14:section name="Multiplexer e demultiplexer" id="{db699782-d4e1-85d2-d7ee-846c09658533}">
           <p14:sldIdLst>
             <p14:sldId id="267"/>
             <p14:sldId id="268"/>
           </p14:sldIdLst>
         </p14:section>
-        <p14:section name="Confrontare e controllare" id="{21ea218e-e271-2900-60f2-141250789e6d}">
+        <p14:section name="Confrontare e controllare" id="{e60b4e17-ebed-adfc-d6ce-73cd071de697}">
           <p14:sldIdLst>
             <p14:sldId id="269"/>
             <p14:sldId id="270"/>
           </p14:sldIdLst>
         </p14:section>
-        <p14:section name="L'unità aritmetico-logica" id="{03763ab3-4a0a-c108-b310-cd5a8bf83e6a}">
+        <p14:section name="L'unità aritmetico-logica" id="{3e4e1a8c-9cc3-009c-2e41-dde2194e748e}">
           <p14:sldIdLst>
             <p14:sldId id="271"/>
             <p14:sldId id="272"/>
@@ -1560,7 +1560,7 @@
           <a:p>
             <a:r>
               <a:rPr lang="en-US" dirty="0"/>
-              <a:t>Sei obiettivi. Distinguere una macchina combinatoria da una sequenziale. Calcolare quanti bit richiede un codice e riconoscere codici incompleti e ridondanti. Progettare un decodificatore e un codificatore, e comporre decodificatori piccoli in decodificatori più grandi. Spiegare multiplexer e demultiplexer e costruirli con le porte. Costruire un comparatore e una rete di parità, sapendo che cosa un controllo di parità può e non può rilevare. E indicare ciascuna di queste macchine dentro il processore.</a:t>
+              <a:t>Sei obiettivi. Distinguere una macchina combinatoria da una sequenziale. Calcolare quanti bit richiede un codice e riconoscere codici incompleti e ridondanti. Progettare un decodificatore e un codificatore, e dire che cosa fa un transcodificatore. Spiegare multiplexer e demultiplexer e costruirli con le porte. Costruire un comparatore e una rete di parità, sapendo che cosa un controllo di parità può e non può rilevare. E indicare ciascuna di queste macchine dentro il processore.</a:t>
             </a:r>
             <a:endParaRPr lang="en-US" dirty="0"/>
           </a:p>
@@ -1648,7 +1648,7 @@
           <a:p>
             <a:r>
               <a:rPr lang="en-US" dirty="0"/>
-              <a:t>Cinque conclusioni. L'informazione è un attributo, un tipo e un valore, e un codice scrive il valore come stringa. Un codice binario a lunghezza fissa richiede il logaritmo di N bit, arrotondato per eccesso; un codice ridondante ne spende di più per rilevare gli errori. Codifica, decodifica e transcodifica sono svolte da macchine combinatorie. I multiplexer selezionano una sorgente, i demultiplexer una destinazione, comparatori e reti di parità controllano. E il processore li usa tutti. A queste macchine manca la memoria: dopo la Parte 2 di Verm1, la aggiunge la Lezione 13.
+              <a:t>Cinque conclusioni. Un codice scrive ogni elemento di un insieme come stringa di simboli su un alfabeto, la sua parola codice. Un codice binario a lunghezza fissa richiede il logaritmo di N bit, arrotondato per eccesso; un codice ridondante ne spende di più per rilevare gli errori. Codifica, decodifica e transcodifica sono svolte da macchine combinatorie. I multiplexer selezionano una sorgente, i demultiplexer una destinazione, comparatori e reti di parità controllano. E il processore li usa tutti. A queste macchine manca la memoria: dopo la Parte 2 di Verm1, la aggiunge la Lezione 13.
 Per il docente: A seguire: Verm1, parte 2: la guida e il cibo. Poi le macchine sequenziali: ciò che qui manca è la memoria.</a:t>
             </a:r>
             <a:endParaRPr lang="en-US" dirty="0"/>
@@ -3302,7 +3302,63 @@
       </p:sp>
       <p:sp>
         <p:nvSpPr>
-          <p:cNvPr id="12" name="Shape 10"/>
+          <p:cNvPr id="12" name="Text 10"/>
+          <p:cNvSpPr txBox="1"/>
+          <p:nvPr/>
+        </p:nvSpPr>
+        <p:spPr>
+          <a:xfrm>
+            <a:off x="4693615" y="566928"/>
+            <a:ext cx="6949440" cy="640080"/>
+          </a:xfrm>
+          <a:prstGeom prst="rect">
+            <a:avLst/>
+          </a:prstGeom>
+          <a:noFill/>
+          <a:ln/>
+        </p:spPr>
+        <p:txBody>
+          <a:bodyPr wrap="square" lIns="0" tIns="0" rIns="0" bIns="0" rtlCol="0" anchor="t"/>
+          <a:lstStyle/>
+          <a:p>
+            <a:pPr algn="r" indent="0" marL="0">
+              <a:buNone/>
+            </a:pPr>
+            <a:r>
+              <a:rPr lang="en-US" sz="1300" dirty="0">
+                <a:solidFill>
+                  <a:srgbClr val="CFE3EA"/>
+                </a:solidFill>
+                <a:latin typeface="Calibri" pitchFamily="34" charset="0"/>
+                <a:ea typeface="Calibri" pitchFamily="34" charset="-122"/>
+                <a:cs typeface="Calibri" pitchFamily="34" charset="-120"/>
+              </a:rPr>
+              <a:t>Presentazione della lezione. I listati, il programma completo e come provarlo sono nella presentazione del codice:</a:t>
+            </a:r>
+            <a:endParaRPr lang="en-US" sz="1300" dirty="0"/>
+          </a:p>
+          <a:p>
+            <a:pPr algn="r" indent="0" marL="0">
+              <a:buNone/>
+            </a:pPr>
+            <a:r>
+              <a:rPr lang="en-US" sz="1300" dirty="0">
+                <a:solidFill>
+                  <a:srgbClr val="CFE3EA"/>
+                </a:solidFill>
+                <a:latin typeface="Calibri" pitchFamily="34" charset="0"/>
+                <a:ea typeface="Calibri" pitchFamily="34" charset="-122"/>
+                <a:cs typeface="Calibri" pitchFamily="34" charset="-120"/>
+              </a:rPr>
+              <a:t>11-Architettura_dei_Calcolatori-Macchine_Combinatorie-Codice.pptx</a:t>
+            </a:r>
+            <a:endParaRPr lang="en-US" sz="1300" dirty="0"/>
+          </a:p>
+        </p:txBody>
+      </p:sp>
+      <p:sp>
+        <p:nvSpPr>
+          <p:cNvPr id="13" name="Shape 11"/>
           <p:cNvSpPr/>
           <p:nvPr/>
         </p:nvSpPr>
@@ -3329,7 +3385,7 @@
       </p:sp>
       <p:pic>
         <p:nvPicPr>
-          <p:cNvPr id="13" name="Image 0" descr="/Users/raffaelemontella/devel/riscv-prg32/computer-architecture-with-prg32/tools/assets/game_breakout.png">    </p:cNvPr>
+          <p:cNvPr id="14" name="Image 0" descr="/Users/raffaelemontella/devel/riscv-prg32/computer-architecture-with-prg32/tools/assets/game_breakout.png">    </p:cNvPr>
           <p:cNvPicPr>
             <a:picLocks noChangeAspect="1"/>
           </p:cNvPicPr>
@@ -21113,7 +21169,7 @@
                 <a:ea typeface="Calibri" pitchFamily="34" charset="-122"/>
                 <a:cs typeface="Calibri" pitchFamily="34" charset="-120"/>
               </a:rPr>
-              <a:t>Progettare un decodificatore e un codificatore, e comporre decodificatori piccoli in decodificatori più grandi</a:t>
+              <a:t>Progettare un decodificatore e un codificatore, e dire che cosa fa un transcodificatore</a:t>
             </a:r>
             <a:endParaRPr lang="en-US" sz="2200" dirty="0"/>
           </a:p>
@@ -21561,7 +21617,7 @@
                 <a:ea typeface="Calibri" pitchFamily="34" charset="-122"/>
                 <a:cs typeface="Calibri" pitchFamily="34" charset="-120"/>
               </a:rPr>
-              <a:t>L'informazione è un attributo, un tipo e un valore; un codice scrive il valore come stringa su un alfabeto</a:t>
+              <a:t>Un codice scrive ogni elemento di un insieme come stringa di simboli su un alfabeto: la sua parola codice</a:t>
             </a:r>
             <a:endParaRPr lang="en-US" sz="1900" dirty="0"/>
           </a:p>

--- a/it/slides/11-Architettura_dei_Calcolatori-Macchine_Combinatorie.pptx
+++ b/it/slides/11-Architettura_dei_Calcolatori-Macchine_Combinatorie.pptx
@@ -126,26 +126,26 @@
   <p:extLst>
     <p:ext uri="{521415D9-36F7-43E2-AB2F-B90AF26B5E84}">
       <p14:sectionLst xmlns:p14="http://schemas.microsoft.com/office/powerpoint/2010/main">
-        <p14:section name="Apertura" id="{c5287129-bb78-ed25-2b49-c0645655cf8e}">
+        <p14:section name="Apertura" id="{b71e7298-ae65-efa7-8c0b-bd153e2ba094}">
           <p14:sldIdLst>
             <p14:sldId id="256"/>
             <p14:sldId id="257"/>
           </p14:sldIdLst>
         </p14:section>
-        <p14:section name="Macchine combinatorie" id="{685ba264-9c4c-bfdc-4464-0e120fe924e1}">
+        <p14:section name="Macchine combinatorie" id="{a687366e-9029-bed0-37df-801a99bce457}">
           <p14:sldIdLst>
             <p14:sldId id="258"/>
             <p14:sldId id="259"/>
           </p14:sldIdLst>
         </p14:section>
-        <p14:section name="Codici" id="{d47b5a72-e4cf-799a-814d-e5e309561ee0}">
+        <p14:section name="Codici" id="{af204aa1-7563-2d12-2c01-e66e1d665662}">
           <p14:sldIdLst>
             <p14:sldId id="260"/>
             <p14:sldId id="261"/>
             <p14:sldId id="262"/>
           </p14:sldIdLst>
         </p14:section>
-        <p14:section name="Decodificatori e codificatori" id="{6bcc12f1-910a-ad8d-eea3-91ebb55ab3f2}">
+        <p14:section name="Decodificatori e codificatori" id="{fa351618-2343-02b0-2be3-686d5bff8d75}">
           <p14:sldIdLst>
             <p14:sldId id="263"/>
             <p14:sldId id="264"/>
@@ -153,19 +153,19 @@
             <p14:sldId id="266"/>
           </p14:sldIdLst>
         </p14:section>
-        <p14:section name="Multiplexer e demultiplexer" id="{db699782-d4e1-85d2-d7ee-846c09658533}">
+        <p14:section name="Multiplexer e demultiplexer" id="{fd8ae33f-6c8b-4576-a6c7-add6fe40f5a2}">
           <p14:sldIdLst>
             <p14:sldId id="267"/>
             <p14:sldId id="268"/>
           </p14:sldIdLst>
         </p14:section>
-        <p14:section name="Confrontare e controllare" id="{e60b4e17-ebed-adfc-d6ce-73cd071de697}">
+        <p14:section name="Confrontare e controllare" id="{1d26014d-a93f-6437-17be-5082deea643d}">
           <p14:sldIdLst>
             <p14:sldId id="269"/>
             <p14:sldId id="270"/>
           </p14:sldIdLst>
         </p14:section>
-        <p14:section name="L'unità aritmetico-logica" id="{3e4e1a8c-9cc3-009c-2e41-dde2194e748e}">
+        <p14:section name="L'unità aritmetico-logica" id="{75c7edda-23ef-8a51-0443-3422218ec9b5}">
           <p14:sldIdLst>
             <p14:sldId id="271"/>
             <p14:sldId id="272"/>
@@ -579,6 +579,8 @@
             <a:r>
               <a:rPr lang="en-US" dirty="0"/>
               <a:t>Le lezioni precedenti vi hanno dato le porte e un metodo per combinarle. Questa è un catalogo delle macchine che i progettisti usano davvero: decodificatori, codificatori, multiplexer, comparatori, reti di parità, e infine l'unità aritmetico-logica. Per ciascuna imparate che cosa fa, come è costruita, e dove sta dentro un processore RISC-V. Il giovane Turing della citazione vuole carote e piselli ben separati: questa lezione parla di tenere le cose distinte, e di scegliere tra esse.
+Stato di apprendimento: DA COMPRENDERE OGGI, alla fine di questa lezione lo spiegate, lo seguite passo passo e lo applicate da soli; DA UTILIZZARE OGGI, oggi seguite e usate la ricetta; come funziona dentro si spiega più avanti, o non fa parte del corso; DA COMPRENDERE PIÙ AVANTI, riconoscete il nome e lo scopo; lo spiega una lezione successiva. Una slide senza etichetta è contesto: una storia, un esempio, una domanda, un esercizio.
+Stato di apprendimento di questa lezione. DA COMPRENDERE OGGI: i multiplexer; le reti combinatorie; i codici; decoder ed encoder; comparatori e parità; l'ALU. DA UTILIZZARE OGGI: il programma completo, gli strumenti di PRG32 (si usa, non si studia, in questo corso). DA COMPRENDERE PIÙ AVANTI: macchine a stati finiti (Lezione 13). Una slide senza etichetta è contesto: una storia, un esempio, una domanda, un esercizio.
 Per il docente: Spirale: una ricerca in tabella in assembly è un multiplexer; la lezione costruisce poi i blocchi combinatori standard e mostra dove sta ciascuno dentro un processore RISC-V (il corso degli anni precedenti usava come riferimento il Motorola 68000).</a:t>
             </a:r>
             <a:endParaRPr lang="en-US" dirty="0"/>
@@ -668,6 +670,7 @@
             <a:r>
               <a:rPr lang="en-US" dirty="0"/>
               <a:t>Il codificatore è la macchina inversa: riceve N linee, di cui una attiva, e ne produce il numero come parola codice di m bit. Ogni bit di uscita è l'OR delle linee di ingresso il cui numero ha un 1 in quella posizione. Se più linee possono essere attive insieme serve un codificatore con priorità, che dà in uscita il numero della linea attiva più importante. Lo ritroverete con le interruzioni, quando più dispositivi chiedono attenzione nello stesso momento.
+DA COMPRENDERE OGGI: decoder ed encoder.
 Per il docente: Per N = 4: C0 = U1 + U3, C1 = U2 + U3. I codificatori con priorità ricompaiono con le interruzioni: più dispositivi chiedono attenzione, un solo numero arriva al processore.</a:t>
             </a:r>
             <a:endParaRPr lang="en-US" dirty="0"/>
@@ -757,6 +760,7 @@
             <a:r>
               <a:rPr lang="en-US" dirty="0"/>
               <a:t>Un transcodificatore converte una parola di un codice nella parola corrispondente di un altro codice. L'esempio è il display a sette segmenti: l'ingresso è una cifra BCD, le uscite sono le sette linee che accendono i segmenti, chiamati da a a g. La tabella dà, per ogni cifra, i segmenti accesi: la cifra 2 accende a, b, g, e e d. Le uscite sono sette, quindi ci sono sette funzioni di quattro variabili da sintetizzare, ciascuna con sei indifferenze.
+DA COMPRENDERE OGGI: decoder ed encoder.
 Per il docente: Transcodificatore BCD - display a 7 segmenti. Ogni segmento è un LED comandato da un segnale digitale. Le sei parole BCD non usate sono indifferenze per tutte e sette le funzioni.</a:t>
             </a:r>
             <a:endParaRPr lang="en-US" dirty="0"/>
@@ -846,6 +850,7 @@
             <a:r>
               <a:rPr lang="en-US" dirty="0"/>
               <a:t>Un multiplexer ha 2 alla n ingressi dati, n linee di selezione e un'uscita: trasferisce sull'uscita l'ingresso scelto dalle linee di selezione. La formula mostra come: ogni ingresso dati è moltiplicato per un mintermine delle linee di selezione, e i prodotti si sommano. Con due ingressi, Y = S'I0 + S I1: quando S vale 0 il primo termine lascia passare I0, quando S vale 1 il secondo lascia passare I1. Il disegno è esattamente questa formula in porte. È la macchina del riscaldamento.
+DA COMPRENDERE OGGI: i multiplexer.
 Per il docente: Multiplexer indirizzabile: un MUXL (una linea di abilitazione per ingresso) più un decodificatore. Un multiplexer realizza anche qualunque funzione delle sue variabili di selezione: si mette la tabella di verità sugli ingressi dati.</a:t>
             </a:r>
             <a:endParaRPr lang="en-US" dirty="0"/>
@@ -935,6 +940,7 @@
             <a:r>
               <a:rPr lang="en-US" dirty="0"/>
               <a:t>Il demultiplexer è l'inverso: un ingresso dati, n linee di selezione e 2 alla n uscite. L'ingresso è instradato sull'uscita scelta dalle linee di selezione, e le altre uscite restano a 0. Con l'ingresso dati fisso a 1 è esattamente un decodificatore. Un multiplexer a un capo di un filo e un demultiplexer all'altro permettono a molti segnali di condividere quel filo, uno alla volta: è l'idea che sta dietro ogni linea condivisa, compresi i bus della Lezione 14.
+DA COMPRENDERE OGGI: i multiplexer.
 Per il docente: Demultiplexer indirizzabile: Fi = D . Ui, dove Ui sono le uscite del decodificatore.</a:t>
             </a:r>
             <a:endParaRPr lang="en-US" dirty="0"/>
@@ -1024,6 +1030,7 @@
             <a:r>
               <a:rPr lang="en-US" dirty="0"/>
               <a:t>Un comparatore riceve due parole e produce un bit, che vale 1 quando sono uguali. Due bit sono uguali quando il loro XNOR vale 1; due parole sono uguali quando lo sono tutte le loro coppie di bit, quindi il comparatore è un AND di XNOR. Il disegno lo mostra per parole di due bit. Nel processore decide i salti beq e bne: i due registri vengono confrontati, e il salto avviene o no secondo il risultato.
+DA COMPRENDERE OGGI: comparatori e parità.
 Per il docente: Molti datapath riusano invece la ALU: sottraggono e verificano se il risultato è zero. I confronti d'ordine (blt, slt) richiedono la sottrazione e le regole di segno della Lezione 05.</a:t>
             </a:r>
             <a:endParaRPr lang="en-US" dirty="0"/>
@@ -1113,6 +1120,7 @@
             <a:r>
               <a:rPr lang="en-US" dirty="0"/>
               <a:t>Il codice ridondante più semplice aggiunge a ogni parola un bit di parità, scelto in modo che il numero totale di 1 sia, per esempio, pari. Il circuito che lo calcola è una rete di parità, una catena di XOR: lo XOR di tutti i bit di una parola vale 1 quando il numero di 1 è dispari, perché XOR è la somma modulo 2. La rete si usa due volte: da chi trasmette, per calcolare il bit da aggiungere, e da chi riceve, per verificare la parità di ciò che è arrivato.
+DA COMPRENDERE OGGI: comparatori e parità.
 Per il docente: In inglese: parity network. XOR è la somma modulo 2, ed è per questo che una catena di XOR conta gli 1 modulo 2.</a:t>
             </a:r>
             <a:endParaRPr lang="en-US" dirty="0"/>
@@ -1202,6 +1210,7 @@
             <a:r>
               <a:rPr lang="en-US" dirty="0"/>
               <a:t>La ALU riceve due parole, A e B. Al suo interno più unità lavorano insieme sugli stessi operandi: un addizionatore che fa anche le sottrazioni, una fila di porte AND, una di porte OR, una di porte XOR, uno shifter. Tutte producono un risultato. Un multiplexer lascia passare uno dei risultati, e le sue linee di selezione vengono da un decodificatore che legge l'istruzione. Non c'è memoria da nessuna parte: la ALU è un'unica grande macchina combinatoria, e il suo percorso più lento, la catena dei riporti dell'addizionatore, limita il clock del processore.
+DA COMPRENDERE OGGI: l'ALU.
 Per il docente: In inglese: arithmetic logic unit. L'addizionatore è il sommatore a propagazione del riporto della Lezione 09, con il trucco del complemento e del riporto della Lezione 05 per la sottrazione. I confronti (slt) riusano il sottrattore.</a:t>
             </a:r>
             <a:endParaRPr lang="en-US" dirty="0"/>
@@ -1649,6 +1658,7 @@
             <a:r>
               <a:rPr lang="en-US" dirty="0"/>
               <a:t>Cinque conclusioni. Un codice scrive ogni elemento di un insieme come stringa di simboli su un alfabeto, la sua parola codice. Un codice binario a lunghezza fissa richiede il logaritmo di N bit, arrotondato per eccesso; un codice ridondante ne spende di più per rilevare gli errori. Codifica, decodifica e transcodifica sono svolte da macchine combinatorie. I multiplexer selezionano una sorgente, i demultiplexer una destinazione, comparatori e reti di parità controllano. E il processore li usa tutti. A queste macchine manca la memoria: dopo la Parte 2 di Verm1, la aggiunge la Lezione 13.
+Stato di apprendimento, riepilogo. DA COMPRENDERE OGGI: i multiplexer; le reti combinatorie; i codici; decoder ed encoder; comparatori e parità; l'ALU. DA UTILIZZARE OGGI: il programma completo, gli strumenti di PRG32 (si usa, non si studia, in questo corso). DA COMPRENDERE PIÙ AVANTI: macchine a stati finiti (Lezione 13). Una slide senza etichetta è contesto: una storia, un esempio, una domanda, un esercizio.
 Per il docente: A seguire: Verm1, parte 2: la guida e il cibo. Poi le macchine sequenziali: ciò che qui manca è la memoria.</a:t>
             </a:r>
             <a:endParaRPr lang="en-US" dirty="0"/>
@@ -1738,6 +1748,7 @@
             <a:r>
               <a:rPr lang="en-US" dirty="0"/>
               <a:t>I circuiti digitali sono di due tipi. In un circuito combinatorio le uscite in un dato istante dipendono solo dagli ingressi in quello stesso istante: non c'è memoria né retroazione, e una tabella di verità descrive completamente il circuito. In un circuito sequenziale le uscite dipendono anche dalla storia passata degli ingressi: servono le nozioni di tempo e di stato. Sommatori, decodificatori e multiplexer sono combinatori; flip-flop, registri e il processore nel suo insieme sono sequenziali, e sono l'argomento della Lezione 13.
+DA COMPRENDERE OGGI: le reti combinatorie. DA COMPRENDERE PIÙ AVANTI: macchine a stati finiti (si studia nella Lezione 13).
 Per il docente: In inglese: combinational e sequential circuits. La definizione di circuito sequenziale implica tempo e stato: entrambi sono l'argomento della prossima lezione.</a:t>
             </a:r>
             <a:endParaRPr lang="en-US" dirty="0"/>
@@ -1827,6 +1838,7 @@
             <a:r>
               <a:rPr lang="en-US" dirty="0"/>
               <a:t>Una porta reale non risponde all'istante: la sua uscita si assesta dopo un ritardo di propagazione, come ha spiegato la Lezione 10. Il ritardo di una rete è quello del suo percorso più lento da un ingresso a un'uscita, il percorso critico. Mentre i segnali viaggiano le uscite possono essere temporaneamente sbagliate. Quindi una macchina combinatoria è corretta solo dopo essersi assestata, e qualcosa deve dire quando guardarne le uscite. Quel qualcosa è il clock, ed è lì che cominciano le macchine sequenziali.
+DA COMPRENDERE OGGI: le reti combinatorie.
 Per il docente: In un sommatore a propagazione del riporto (Lezione 09) il percorso critico attraversa tutti e trentadue i sommatori completi. Il periodo di clock di un processore deve essere più lungo del suo percorso critico più lungo.</a:t>
             </a:r>
             <a:endParaRPr lang="en-US" dirty="0"/>
@@ -1916,6 +1928,7 @@
             <a:r>
               <a:rPr lang="en-US" dirty="0"/>
               <a:t>Un codice associa a ogni elemento di un insieme di N elementi una stringa di simboli, la parola codice. In un codice a lunghezza fissa tutte le parole hanno la stessa lunghezza m. Con un alfabeto di k simboli le parole sono k alla m, quindi m deve essere almeno il logaritmo di N, arrotondato per eccesso. In binario: quattordici voti richiedono 4 bit, e i 32 registri di RISC-V ne richiedono esattamente 5. Quando N non è una potenza di due alcune parole restano inutilizzate, e il codice è incompleto.
+DA COMPRENDERE OGGI: i codici.
 Per il docente: In inglese: fixed-length code. I cinque bit di un numero di registro sono i campi rd, rs1 e rs2 di un'istruzione RISC-V (Lezione 02). Quattordici voti lasciano 16 - 14 = 2 parole non assegnate.</a:t>
             </a:r>
             <a:endParaRPr lang="en-US" dirty="0"/>
@@ -2005,6 +2018,7 @@
             <a:r>
               <a:rPr lang="en-US" dirty="0"/>
               <a:t>Il classico codice incompleto: le cifre decimali su quattro bit. Nel BCD 8421 ogni cifra è semplicemente il suo valore in binario; nell'eccesso 3 il valore è aumentato di tre. Dieci cifre richiedono quattro bit, e quattro bit danno sedici parole, quindi sei non si usano mai: nel BCD, le parole da 1010 a 1111. Ricordate la didascalia: quando si progetta un circuito che riceve cifre BCD, quelle sei parole sono indifferenze e semplificano il circuito.
+DA COMPRENDERE OGGI: i codici.
 Per il docente: Dieci cifre richiedono ceil(log2 10) = 4 bit; sei delle sedici parole non si usano mai: nel BCD 8421 sono da 1010 a 1111. Le parole non usate diventano condizioni di indifferenza quando si progetta un circuito (Lezione 09).</a:t>
             </a:r>
             <a:endParaRPr lang="en-US" dirty="0"/>
@@ -2094,6 +2108,7 @@
             <a:r>
               <a:rPr lang="en-US" dirty="0"/>
               <a:t>Un codice ridondante usa più bit del minimo, quindi solo alcune delle parole possibili sono lecite. Se arriva una parola non lecita, qualcosa l'ha alterata lungo il percorso, e l'errore è rilevato. Confrontate i due codici della tabella. Nel Codice 1 ogni parola di 2 bit è lecita: un bit alterato trasforma un elemento in un altro e nessuno se ne accorge. Il Codice 2 aggiunge un terzo bit che rende pari il numero di 1: qualunque bit singolo alterato produce una parola non lecita. La ridondanza è il prezzo pagato per rilevare gli errori.
+DA COMPRENDERE OGGI: i codici.
 Per il docente: La slide originale mostrava la stessa idea con una figura e una diversa scelta delle parole non lecite. Il Codice 2 è il Codice 1 più un bit di parità pari: le macchine di parità vengono più avanti in questa lezione.</a:t>
             </a:r>
             <a:endParaRPr lang="en-US" dirty="0"/>
@@ -2183,6 +2198,7 @@
             <a:r>
               <a:rPr lang="en-US" dirty="0"/>
               <a:t>Nella rappresentazione decodificata ci sono tanti bit quanti elementi, ed esattamente uno vale 1: una linea per elemento. Si dice anche one-hot. È costosa in fili ma immediatamente utilizzabile, perché la linea attiva può accendere direttamente qualcosa. La regola pratica sta nell'ultima riga: si tiene l'informazione in un codice compatto dentro una parola, e la si decodifica dove una scelta va attuata.
+DA COMPRENDERE OGGI: decoder ed encoder.
 Per il docente: Detta anche one-hot. Le sette lampade del laboratorio 06 sono una rappresentazione decodificata del numero di bit; le 32 linee di abilitazione alla scrittura dei registri RISC-V ne sono un'altra.</a:t>
             </a:r>
             <a:endParaRPr lang="en-US" dirty="0"/>
@@ -2272,6 +2288,7 @@
             <a:r>
               <a:rPr lang="en-US" dirty="0"/>
               <a:t>Un decodificatore riceve una parola codice di m bit e attiva l'unica uscita, su 2 alla m, che le corrisponde. La tabella e il circuito mostrano il decodificatore 2-a-4: ogni uscita è un mintermine dei due ingressi, realizzato con una porta AND e, dove serve, con invertitori. Un decodificatore genera quindi tutti i mintermini dei suoi ingressi. Un ingresso di abilitazione, quando vale 0, tiene a 0 tutte le uscite: sarà la chiave per comporre i decodificatori.
+DA COMPRENDERE OGGI: decoder ed encoder.
 Per il docente: Sintesi del decodificatore 2-a-4 (1 su 4). A è il bit meno significativo. Il simbolo a blocchi è un riquadro con la scritta 1/N.</a:t>
             </a:r>
             <a:endParaRPr lang="en-US" dirty="0"/>
@@ -3409,6 +3426,420 @@
       </p:pic>
       <p:sp>
         <p:nvSpPr>
+          <p:cNvPr id="15" name="Shape 12"/>
+          <p:cNvSpPr/>
+          <p:nvPr/>
+        </p:nvSpPr>
+        <p:spPr>
+          <a:xfrm>
+            <a:off x="8910777" y="91440"/>
+            <a:ext cx="2732278" cy="274320"/>
+          </a:xfrm>
+          <a:prstGeom prst="rect">
+            <a:avLst/>
+          </a:prstGeom>
+          <a:solidFill>
+            <a:srgbClr val="F3E8FF"/>
+          </a:solidFill>
+          <a:ln w="12700">
+            <a:solidFill>
+              <a:srgbClr val="7E22CE"/>
+            </a:solidFill>
+            <a:prstDash val="dash"/>
+          </a:ln>
+        </p:spPr>
+      </p:sp>
+      <p:sp>
+        <p:nvSpPr>
+          <p:cNvPr id="16" name="Shape 13"/>
+          <p:cNvSpPr/>
+          <p:nvPr/>
+        </p:nvSpPr>
+        <p:spPr>
+          <a:xfrm>
+            <a:off x="8938209" y="128016"/>
+            <a:ext cx="45720" cy="45720"/>
+          </a:xfrm>
+          <a:prstGeom prst="rect">
+            <a:avLst/>
+          </a:prstGeom>
+          <a:solidFill>
+            <a:srgbClr val="7E22CE"/>
+          </a:solidFill>
+          <a:ln w="12700">
+            <a:solidFill>
+              <a:srgbClr val="7E22CE"/>
+            </a:solidFill>
+            <a:prstDash val="solid"/>
+          </a:ln>
+        </p:spPr>
+      </p:sp>
+      <p:sp>
+        <p:nvSpPr>
+          <p:cNvPr id="17" name="Shape 14"/>
+          <p:cNvSpPr/>
+          <p:nvPr/>
+        </p:nvSpPr>
+        <p:spPr>
+          <a:xfrm>
+            <a:off x="8938209" y="205740"/>
+            <a:ext cx="45720" cy="45720"/>
+          </a:xfrm>
+          <a:prstGeom prst="rect">
+            <a:avLst/>
+          </a:prstGeom>
+          <a:solidFill>
+            <a:srgbClr val="7E22CE"/>
+          </a:solidFill>
+          <a:ln w="12700">
+            <a:solidFill>
+              <a:srgbClr val="7E22CE"/>
+            </a:solidFill>
+            <a:prstDash val="solid"/>
+          </a:ln>
+        </p:spPr>
+      </p:sp>
+      <p:sp>
+        <p:nvSpPr>
+          <p:cNvPr id="18" name="Shape 15"/>
+          <p:cNvSpPr/>
+          <p:nvPr/>
+        </p:nvSpPr>
+        <p:spPr>
+          <a:xfrm>
+            <a:off x="8938209" y="283464"/>
+            <a:ext cx="45720" cy="45720"/>
+          </a:xfrm>
+          <a:prstGeom prst="rect">
+            <a:avLst/>
+          </a:prstGeom>
+          <a:solidFill>
+            <a:srgbClr val="7E22CE"/>
+          </a:solidFill>
+          <a:ln w="12700">
+            <a:solidFill>
+              <a:srgbClr val="7E22CE"/>
+            </a:solidFill>
+            <a:prstDash val="solid"/>
+          </a:ln>
+        </p:spPr>
+      </p:sp>
+      <p:pic>
+        <p:nvPicPr>
+          <p:cNvPr id="19" name="Image 1" descr="preencoded.png">    </p:cNvPr>
+          <p:cNvPicPr>
+            <a:picLocks noChangeAspect="1"/>
+          </p:cNvPicPr>
+          <p:nvPr/>
+        </p:nvPicPr>
+        <p:blipFill>
+          <a:blip r:embed="rId2"/>
+          <a:stretch>
+            <a:fillRect/>
+          </a:stretch>
+        </p:blipFill>
+        <p:spPr>
+          <a:xfrm>
+            <a:off x="9038793" y="128016"/>
+            <a:ext cx="201168" cy="201168"/>
+          </a:xfrm>
+          <a:prstGeom prst="rect">
+            <a:avLst/>
+          </a:prstGeom>
+        </p:spPr>
+      </p:pic>
+      <p:sp>
+        <p:nvSpPr>
+          <p:cNvPr id="20" name="Text 16"/>
+          <p:cNvSpPr txBox="1"/>
+          <p:nvPr/>
+        </p:nvSpPr>
+        <p:spPr>
+          <a:xfrm>
+            <a:off x="9294825" y="91440"/>
+            <a:ext cx="2311654" cy="274320"/>
+          </a:xfrm>
+          <a:prstGeom prst="rect">
+            <a:avLst/>
+          </a:prstGeom>
+          <a:noFill/>
+          <a:ln/>
+        </p:spPr>
+        <p:txBody>
+          <a:bodyPr wrap="square" lIns="0" tIns="0" rIns="0" bIns="0" rtlCol="0" anchor="ctr"/>
+          <a:lstStyle/>
+          <a:p>
+            <a:pPr indent="0" marL="0">
+              <a:buNone/>
+            </a:pPr>
+            <a:r>
+              <a:rPr lang="en-US" sz="1100" b="1" dirty="0">
+                <a:solidFill>
+                  <a:srgbClr val="6B21A8"/>
+                </a:solidFill>
+                <a:latin typeface="Calibri" pitchFamily="34" charset="0"/>
+                <a:ea typeface="Calibri" pitchFamily="34" charset="-122"/>
+                <a:cs typeface="Calibri" pitchFamily="34" charset="-120"/>
+              </a:rPr>
+              <a:t>DA COMPRENDERE PIÙ AVANTI</a:t>
+            </a:r>
+            <a:endParaRPr lang="en-US" sz="1100" dirty="0"/>
+          </a:p>
+        </p:txBody>
+      </p:sp>
+      <p:sp>
+        <p:nvSpPr>
+          <p:cNvPr id="21" name="Shape 17"/>
+          <p:cNvSpPr/>
+          <p:nvPr/>
+        </p:nvSpPr>
+        <p:spPr>
+          <a:xfrm>
+            <a:off x="6675069" y="91440"/>
+            <a:ext cx="2125980" cy="274320"/>
+          </a:xfrm>
+          <a:prstGeom prst="rect">
+            <a:avLst/>
+          </a:prstGeom>
+          <a:solidFill>
+            <a:srgbClr val="FEF3C7"/>
+          </a:solidFill>
+          <a:ln w="12700">
+            <a:solidFill>
+              <a:srgbClr val="B45309"/>
+            </a:solidFill>
+            <a:prstDash val="solid"/>
+          </a:ln>
+        </p:spPr>
+      </p:sp>
+      <p:sp>
+        <p:nvSpPr>
+          <p:cNvPr id="22" name="Shape 18"/>
+          <p:cNvSpPr/>
+          <p:nvPr/>
+        </p:nvSpPr>
+        <p:spPr>
+          <a:xfrm>
+            <a:off x="6675069" y="91440"/>
+            <a:ext cx="27432" cy="274320"/>
+          </a:xfrm>
+          <a:prstGeom prst="rect">
+            <a:avLst/>
+          </a:prstGeom>
+          <a:solidFill>
+            <a:srgbClr val="B45309"/>
+          </a:solidFill>
+          <a:ln w="12700">
+            <a:solidFill>
+              <a:srgbClr val="B45309"/>
+            </a:solidFill>
+            <a:prstDash val="solid"/>
+          </a:ln>
+        </p:spPr>
+      </p:sp>
+      <p:sp>
+        <p:nvSpPr>
+          <p:cNvPr id="23" name="Shape 19"/>
+          <p:cNvSpPr/>
+          <p:nvPr/>
+        </p:nvSpPr>
+        <p:spPr>
+          <a:xfrm>
+            <a:off x="6729933" y="91440"/>
+            <a:ext cx="27432" cy="274320"/>
+          </a:xfrm>
+          <a:prstGeom prst="rect">
+            <a:avLst/>
+          </a:prstGeom>
+          <a:solidFill>
+            <a:srgbClr val="B45309"/>
+          </a:solidFill>
+          <a:ln w="12700">
+            <a:solidFill>
+              <a:srgbClr val="B45309"/>
+            </a:solidFill>
+            <a:prstDash val="solid"/>
+          </a:ln>
+        </p:spPr>
+      </p:sp>
+      <p:pic>
+        <p:nvPicPr>
+          <p:cNvPr id="24" name="Image 2" descr="preencoded.png">    </p:cNvPr>
+          <p:cNvPicPr>
+            <a:picLocks noChangeAspect="1"/>
+          </p:cNvPicPr>
+          <p:nvPr/>
+        </p:nvPicPr>
+        <p:blipFill>
+          <a:blip r:embed="rId3"/>
+          <a:stretch>
+            <a:fillRect/>
+          </a:stretch>
+        </p:blipFill>
+        <p:spPr>
+          <a:xfrm>
+            <a:off x="6803085" y="128016"/>
+            <a:ext cx="201168" cy="201168"/>
+          </a:xfrm>
+          <a:prstGeom prst="rect">
+            <a:avLst/>
+          </a:prstGeom>
+        </p:spPr>
+      </p:pic>
+      <p:sp>
+        <p:nvSpPr>
+          <p:cNvPr id="25" name="Text 20"/>
+          <p:cNvSpPr txBox="1"/>
+          <p:nvPr/>
+        </p:nvSpPr>
+        <p:spPr>
+          <a:xfrm>
+            <a:off x="7059117" y="91440"/>
+            <a:ext cx="1705356" cy="274320"/>
+          </a:xfrm>
+          <a:prstGeom prst="rect">
+            <a:avLst/>
+          </a:prstGeom>
+          <a:noFill/>
+          <a:ln/>
+        </p:spPr>
+        <p:txBody>
+          <a:bodyPr wrap="square" lIns="0" tIns="0" rIns="0" bIns="0" rtlCol="0" anchor="ctr"/>
+          <a:lstStyle/>
+          <a:p>
+            <a:pPr indent="0" marL="0">
+              <a:buNone/>
+            </a:pPr>
+            <a:r>
+              <a:rPr lang="en-US" sz="1100" b="1" dirty="0">
+                <a:solidFill>
+                  <a:srgbClr val="92400E"/>
+                </a:solidFill>
+                <a:latin typeface="Calibri" pitchFamily="34" charset="0"/>
+                <a:ea typeface="Calibri" pitchFamily="34" charset="-122"/>
+                <a:cs typeface="Calibri" pitchFamily="34" charset="-120"/>
+              </a:rPr>
+              <a:t>DA UTILIZZARE OGGI</a:t>
+            </a:r>
+            <a:endParaRPr lang="en-US" sz="1100" dirty="0"/>
+          </a:p>
+        </p:txBody>
+      </p:sp>
+      <p:sp>
+        <p:nvSpPr>
+          <p:cNvPr id="26" name="Shape 21"/>
+          <p:cNvSpPr/>
+          <p:nvPr/>
+        </p:nvSpPr>
+        <p:spPr>
+          <a:xfrm>
+            <a:off x="4352747" y="91440"/>
+            <a:ext cx="2212594" cy="274320"/>
+          </a:xfrm>
+          <a:prstGeom prst="rect">
+            <a:avLst/>
+          </a:prstGeom>
+          <a:solidFill>
+            <a:srgbClr val="E0F2FE"/>
+          </a:solidFill>
+          <a:ln w="12700">
+            <a:solidFill>
+              <a:srgbClr val="0369A1"/>
+            </a:solidFill>
+            <a:prstDash val="solid"/>
+          </a:ln>
+        </p:spPr>
+      </p:sp>
+      <p:sp>
+        <p:nvSpPr>
+          <p:cNvPr id="27" name="Shape 22"/>
+          <p:cNvSpPr/>
+          <p:nvPr/>
+        </p:nvSpPr>
+        <p:spPr>
+          <a:xfrm>
+            <a:off x="4352747" y="91440"/>
+            <a:ext cx="73152" cy="274320"/>
+          </a:xfrm>
+          <a:prstGeom prst="rect">
+            <a:avLst/>
+          </a:prstGeom>
+          <a:solidFill>
+            <a:srgbClr val="0369A1"/>
+          </a:solidFill>
+          <a:ln w="12700">
+            <a:solidFill>
+              <a:srgbClr val="0369A1"/>
+            </a:solidFill>
+            <a:prstDash val="solid"/>
+          </a:ln>
+        </p:spPr>
+      </p:sp>
+      <p:pic>
+        <p:nvPicPr>
+          <p:cNvPr id="28" name="Image 3" descr="preencoded.png">    </p:cNvPr>
+          <p:cNvPicPr>
+            <a:picLocks noChangeAspect="1"/>
+          </p:cNvPicPr>
+          <p:nvPr/>
+        </p:nvPicPr>
+        <p:blipFill>
+          <a:blip r:embed="rId4"/>
+          <a:stretch>
+            <a:fillRect/>
+          </a:stretch>
+        </p:blipFill>
+        <p:spPr>
+          <a:xfrm>
+            <a:off x="4480763" y="128016"/>
+            <a:ext cx="201168" cy="201168"/>
+          </a:xfrm>
+          <a:prstGeom prst="rect">
+            <a:avLst/>
+          </a:prstGeom>
+        </p:spPr>
+      </p:pic>
+      <p:sp>
+        <p:nvSpPr>
+          <p:cNvPr id="29" name="Text 23"/>
+          <p:cNvSpPr txBox="1"/>
+          <p:nvPr/>
+        </p:nvSpPr>
+        <p:spPr>
+          <a:xfrm>
+            <a:off x="4736795" y="91440"/>
+            <a:ext cx="1791970" cy="274320"/>
+          </a:xfrm>
+          <a:prstGeom prst="rect">
+            <a:avLst/>
+          </a:prstGeom>
+          <a:noFill/>
+          <a:ln/>
+        </p:spPr>
+        <p:txBody>
+          <a:bodyPr wrap="square" lIns="0" tIns="0" rIns="0" bIns="0" rtlCol="0" anchor="ctr"/>
+          <a:lstStyle/>
+          <a:p>
+            <a:pPr indent="0" marL="0">
+              <a:buNone/>
+            </a:pPr>
+            <a:r>
+              <a:rPr lang="en-US" sz="1100" b="1" dirty="0">
+                <a:solidFill>
+                  <a:srgbClr val="075985"/>
+                </a:solidFill>
+                <a:latin typeface="Calibri" pitchFamily="34" charset="0"/>
+                <a:ea typeface="Calibri" pitchFamily="34" charset="-122"/>
+                <a:cs typeface="Calibri" pitchFamily="34" charset="-120"/>
+              </a:rPr>
+              <a:t>DA COMPRENDERE OGGI</a:t>
+            </a:r>
+            <a:endParaRPr lang="en-US" sz="1100" dirty="0"/>
+          </a:p>
+        </p:txBody>
+      </p:sp>
+      <p:sp>
+        <p:nvSpPr>
           <p:cNvPr id="25" name="Slide Number Placeholder 0"/>
           <p:cNvSpPr>
             <a:spLocks noGrp="1"/>
@@ -3916,6 +4347,133 @@
       </p:sp>
       <p:sp>
         <p:nvSpPr>
+          <p:cNvPr id="14" name="Shape 12"/>
+          <p:cNvSpPr/>
+          <p:nvPr/>
+        </p:nvSpPr>
+        <p:spPr>
+          <a:xfrm>
+            <a:off x="8051622" y="91440"/>
+            <a:ext cx="3591433" cy="274320"/>
+          </a:xfrm>
+          <a:prstGeom prst="rect">
+            <a:avLst/>
+          </a:prstGeom>
+          <a:solidFill>
+            <a:srgbClr val="E0F2FE"/>
+          </a:solidFill>
+          <a:ln w="12700">
+            <a:solidFill>
+              <a:srgbClr val="0369A1"/>
+            </a:solidFill>
+            <a:prstDash val="solid"/>
+          </a:ln>
+        </p:spPr>
+      </p:sp>
+      <p:sp>
+        <p:nvSpPr>
+          <p:cNvPr id="15" name="Shape 13"/>
+          <p:cNvSpPr/>
+          <p:nvPr/>
+        </p:nvSpPr>
+        <p:spPr>
+          <a:xfrm>
+            <a:off x="8051622" y="91440"/>
+            <a:ext cx="73152" cy="274320"/>
+          </a:xfrm>
+          <a:prstGeom prst="rect">
+            <a:avLst/>
+          </a:prstGeom>
+          <a:solidFill>
+            <a:srgbClr val="0369A1"/>
+          </a:solidFill>
+          <a:ln w="12700">
+            <a:solidFill>
+              <a:srgbClr val="0369A1"/>
+            </a:solidFill>
+            <a:prstDash val="solid"/>
+          </a:ln>
+        </p:spPr>
+      </p:sp>
+      <p:pic>
+        <p:nvPicPr>
+          <p:cNvPr id="16" name="Image 0" descr="preencoded.png">    </p:cNvPr>
+          <p:cNvPicPr>
+            <a:picLocks noChangeAspect="1"/>
+          </p:cNvPicPr>
+          <p:nvPr/>
+        </p:nvPicPr>
+        <p:blipFill>
+          <a:blip r:embed="rId1"/>
+          <a:stretch>
+            <a:fillRect/>
+          </a:stretch>
+        </p:blipFill>
+        <p:spPr>
+          <a:xfrm>
+            <a:off x="8179638" y="128016"/>
+            <a:ext cx="201168" cy="201168"/>
+          </a:xfrm>
+          <a:prstGeom prst="rect">
+            <a:avLst/>
+          </a:prstGeom>
+        </p:spPr>
+      </p:pic>
+      <p:sp>
+        <p:nvSpPr>
+          <p:cNvPr id="17" name="Text 14"/>
+          <p:cNvSpPr txBox="1"/>
+          <p:nvPr/>
+        </p:nvSpPr>
+        <p:spPr>
+          <a:xfrm>
+            <a:off x="8435670" y="91440"/>
+            <a:ext cx="3170809" cy="274320"/>
+          </a:xfrm>
+          <a:prstGeom prst="rect">
+            <a:avLst/>
+          </a:prstGeom>
+          <a:noFill/>
+          <a:ln/>
+        </p:spPr>
+        <p:txBody>
+          <a:bodyPr wrap="square" lIns="0" tIns="0" rIns="0" bIns="0" rtlCol="0" anchor="ctr"/>
+          <a:lstStyle/>
+          <a:p>
+            <a:pPr indent="0" marL="0">
+              <a:buNone/>
+            </a:pPr>
+            <a:r>
+              <a:rPr lang="en-US" sz="1100" b="1" dirty="0">
+                <a:solidFill>
+                  <a:srgbClr val="075985"/>
+                </a:solidFill>
+                <a:latin typeface="Calibri" pitchFamily="34" charset="0"/>
+                <a:ea typeface="Calibri" pitchFamily="34" charset="-122"/>
+                <a:cs typeface="Calibri" pitchFamily="34" charset="-120"/>
+              </a:rPr>
+              <a:t>DA COMPRENDERE OGGI</a:t>
+            </a:r>
+            <a:pPr indent="0" marL="0">
+              <a:buNone/>
+            </a:pPr>
+            <a:r>
+              <a:rPr lang="en-US" sz="1100" dirty="0">
+                <a:solidFill>
+                  <a:srgbClr val="075985"/>
+                </a:solidFill>
+                <a:latin typeface="Calibri" pitchFamily="34" charset="0"/>
+                <a:ea typeface="Calibri" pitchFamily="34" charset="-122"/>
+                <a:cs typeface="Calibri" pitchFamily="34" charset="-120"/>
+              </a:rPr>
+              <a:t> · decoder ed encoder</a:t>
+            </a:r>
+            <a:endParaRPr lang="en-US" sz="1100" dirty="0"/>
+          </a:p>
+        </p:txBody>
+      </p:sp>
+      <p:sp>
+        <p:nvSpPr>
           <p:cNvPr id="25" name="Slide Number Placeholder 0"/>
           <p:cNvSpPr>
             <a:spLocks noGrp="1"/>
@@ -4028,9 +4586,59 @@
           </a:p>
         </p:txBody>
       </p:sp>
+      <p:sp>
+        <p:nvSpPr>
+          <p:cNvPr id="3" name="Shape 1"/>
+          <p:cNvSpPr/>
+          <p:nvPr/>
+        </p:nvSpPr>
+        <p:spPr>
+          <a:xfrm>
+            <a:off x="8051622" y="91440"/>
+            <a:ext cx="3591433" cy="274320"/>
+          </a:xfrm>
+          <a:prstGeom prst="rect">
+            <a:avLst/>
+          </a:prstGeom>
+          <a:solidFill>
+            <a:srgbClr val="E0F2FE"/>
+          </a:solidFill>
+          <a:ln w="12700">
+            <a:solidFill>
+              <a:srgbClr val="0369A1"/>
+            </a:solidFill>
+            <a:prstDash val="solid"/>
+          </a:ln>
+        </p:spPr>
+      </p:sp>
+      <p:sp>
+        <p:nvSpPr>
+          <p:cNvPr id="4" name="Shape 2"/>
+          <p:cNvSpPr/>
+          <p:nvPr/>
+        </p:nvSpPr>
+        <p:spPr>
+          <a:xfrm>
+            <a:off x="8051622" y="91440"/>
+            <a:ext cx="73152" cy="274320"/>
+          </a:xfrm>
+          <a:prstGeom prst="rect">
+            <a:avLst/>
+          </a:prstGeom>
+          <a:solidFill>
+            <a:srgbClr val="0369A1"/>
+          </a:solidFill>
+          <a:ln w="12700">
+            <a:solidFill>
+              <a:srgbClr val="0369A1"/>
+            </a:solidFill>
+            <a:prstDash val="solid"/>
+          </a:ln>
+        </p:spPr>
+      </p:sp>
       <p:pic>
         <p:nvPicPr>
-          <p:cNvPr id="4" name="Image 0" descr="preencoded.png">    </p:cNvPr>
+          <p:cNvPr id="5" name="Image 0" descr="preencoded.png">    </p:cNvPr>
           <p:cNvPicPr>
             <a:picLocks noChangeAspect="1"/>
           </p:cNvPicPr>
@@ -4038,6 +4646,83 @@
         </p:nvPicPr>
         <p:blipFill>
           <a:blip r:embed="rId1"/>
+          <a:stretch>
+            <a:fillRect/>
+          </a:stretch>
+        </p:blipFill>
+        <p:spPr>
+          <a:xfrm>
+            <a:off x="8179638" y="128016"/>
+            <a:ext cx="201168" cy="201168"/>
+          </a:xfrm>
+          <a:prstGeom prst="rect">
+            <a:avLst/>
+          </a:prstGeom>
+        </p:spPr>
+      </p:pic>
+      <p:sp>
+        <p:nvSpPr>
+          <p:cNvPr id="6" name="Text 3"/>
+          <p:cNvSpPr txBox="1"/>
+          <p:nvPr/>
+        </p:nvSpPr>
+        <p:spPr>
+          <a:xfrm>
+            <a:off x="8435670" y="91440"/>
+            <a:ext cx="3170809" cy="274320"/>
+          </a:xfrm>
+          <a:prstGeom prst="rect">
+            <a:avLst/>
+          </a:prstGeom>
+          <a:noFill/>
+          <a:ln/>
+        </p:spPr>
+        <p:txBody>
+          <a:bodyPr wrap="square" lIns="0" tIns="0" rIns="0" bIns="0" rtlCol="0" anchor="ctr"/>
+          <a:lstStyle/>
+          <a:p>
+            <a:pPr indent="0" marL="0">
+              <a:buNone/>
+            </a:pPr>
+            <a:r>
+              <a:rPr lang="en-US" sz="1100" b="1" dirty="0">
+                <a:solidFill>
+                  <a:srgbClr val="075985"/>
+                </a:solidFill>
+                <a:latin typeface="Calibri" pitchFamily="34" charset="0"/>
+                <a:ea typeface="Calibri" pitchFamily="34" charset="-122"/>
+                <a:cs typeface="Calibri" pitchFamily="34" charset="-120"/>
+              </a:rPr>
+              <a:t>DA COMPRENDERE OGGI</a:t>
+            </a:r>
+            <a:pPr indent="0" marL="0">
+              <a:buNone/>
+            </a:pPr>
+            <a:r>
+              <a:rPr lang="en-US" sz="1100" dirty="0">
+                <a:solidFill>
+                  <a:srgbClr val="075985"/>
+                </a:solidFill>
+                <a:latin typeface="Calibri" pitchFamily="34" charset="0"/>
+                <a:ea typeface="Calibri" pitchFamily="34" charset="-122"/>
+                <a:cs typeface="Calibri" pitchFamily="34" charset="-120"/>
+              </a:rPr>
+              <a:t> · decoder ed encoder</a:t>
+            </a:r>
+            <a:endParaRPr lang="en-US" sz="1100" dirty="0"/>
+          </a:p>
+        </p:txBody>
+      </p:sp>
+      <p:pic>
+        <p:nvPicPr>
+          <p:cNvPr id="8" name="Image 1" descr="preencoded.png">    </p:cNvPr>
+          <p:cNvPicPr>
+            <a:picLocks noChangeAspect="1"/>
+          </p:cNvPicPr>
+          <p:nvPr/>
+        </p:nvPicPr>
+        <p:blipFill>
+          <a:blip r:embed="rId2"/>
           <a:stretch>
             <a:fillRect/>
           </a:stretch>
@@ -10845,7 +11530,7 @@
       </p:graphicFrame>
       <p:sp>
         <p:nvSpPr>
-          <p:cNvPr id="6" name="Shape 1"/>
+          <p:cNvPr id="10" name="Shape 4"/>
           <p:cNvSpPr/>
           <p:nvPr/>
         </p:nvSpPr>
@@ -10872,7 +11557,7 @@
       </p:sp>
       <p:sp>
         <p:nvSpPr>
-          <p:cNvPr id="7" name="Text 2"/>
+          <p:cNvPr id="11" name="Text 5"/>
           <p:cNvSpPr txBox="1"/>
           <p:nvPr/>
         </p:nvSpPr>
@@ -11431,9 +12116,59 @@
           </a:ln>
         </p:spPr>
       </p:sp>
+      <p:sp>
+        <p:nvSpPr>
+          <p:cNvPr id="13" name="Shape 11"/>
+          <p:cNvSpPr/>
+          <p:nvPr/>
+        </p:nvSpPr>
+        <p:spPr>
+          <a:xfrm>
+            <a:off x="8379917" y="91440"/>
+            <a:ext cx="3263138" cy="274320"/>
+          </a:xfrm>
+          <a:prstGeom prst="rect">
+            <a:avLst/>
+          </a:prstGeom>
+          <a:solidFill>
+            <a:srgbClr val="E0F2FE"/>
+          </a:solidFill>
+          <a:ln w="12700">
+            <a:solidFill>
+              <a:srgbClr val="0369A1"/>
+            </a:solidFill>
+            <a:prstDash val="solid"/>
+          </a:ln>
+        </p:spPr>
+      </p:sp>
+      <p:sp>
+        <p:nvSpPr>
+          <p:cNvPr id="14" name="Shape 12"/>
+          <p:cNvSpPr/>
+          <p:nvPr/>
+        </p:nvSpPr>
+        <p:spPr>
+          <a:xfrm>
+            <a:off x="8379917" y="91440"/>
+            <a:ext cx="73152" cy="274320"/>
+          </a:xfrm>
+          <a:prstGeom prst="rect">
+            <a:avLst/>
+          </a:prstGeom>
+          <a:solidFill>
+            <a:srgbClr val="0369A1"/>
+          </a:solidFill>
+          <a:ln w="12700">
+            <a:solidFill>
+              <a:srgbClr val="0369A1"/>
+            </a:solidFill>
+            <a:prstDash val="solid"/>
+          </a:ln>
+        </p:spPr>
+      </p:sp>
       <p:pic>
         <p:nvPicPr>
-          <p:cNvPr id="14" name="Image 0" descr="preencoded.png">    </p:cNvPr>
+          <p:cNvPr id="15" name="Image 0" descr="preencoded.png">    </p:cNvPr>
           <p:cNvPicPr>
             <a:picLocks noChangeAspect="1"/>
           </p:cNvPicPr>
@@ -11447,6 +12182,83 @@
         </p:blipFill>
         <p:spPr>
           <a:xfrm>
+            <a:off x="8507933" y="128016"/>
+            <a:ext cx="201168" cy="201168"/>
+          </a:xfrm>
+          <a:prstGeom prst="rect">
+            <a:avLst/>
+          </a:prstGeom>
+        </p:spPr>
+      </p:pic>
+      <p:sp>
+        <p:nvSpPr>
+          <p:cNvPr id="16" name="Text 13"/>
+          <p:cNvSpPr txBox="1"/>
+          <p:nvPr/>
+        </p:nvSpPr>
+        <p:spPr>
+          <a:xfrm>
+            <a:off x="8763965" y="91440"/>
+            <a:ext cx="2842514" cy="274320"/>
+          </a:xfrm>
+          <a:prstGeom prst="rect">
+            <a:avLst/>
+          </a:prstGeom>
+          <a:noFill/>
+          <a:ln/>
+        </p:spPr>
+        <p:txBody>
+          <a:bodyPr wrap="square" lIns="0" tIns="0" rIns="0" bIns="0" rtlCol="0" anchor="ctr"/>
+          <a:lstStyle/>
+          <a:p>
+            <a:pPr indent="0" marL="0">
+              <a:buNone/>
+            </a:pPr>
+            <a:r>
+              <a:rPr lang="en-US" sz="1100" b="1" dirty="0">
+                <a:solidFill>
+                  <a:srgbClr val="075985"/>
+                </a:solidFill>
+                <a:latin typeface="Calibri" pitchFamily="34" charset="0"/>
+                <a:ea typeface="Calibri" pitchFamily="34" charset="-122"/>
+                <a:cs typeface="Calibri" pitchFamily="34" charset="-120"/>
+              </a:rPr>
+              <a:t>DA COMPRENDERE OGGI</a:t>
+            </a:r>
+            <a:pPr indent="0" marL="0">
+              <a:buNone/>
+            </a:pPr>
+            <a:r>
+              <a:rPr lang="en-US" sz="1100" dirty="0">
+                <a:solidFill>
+                  <a:srgbClr val="075985"/>
+                </a:solidFill>
+                <a:latin typeface="Calibri" pitchFamily="34" charset="0"/>
+                <a:ea typeface="Calibri" pitchFamily="34" charset="-122"/>
+                <a:cs typeface="Calibri" pitchFamily="34" charset="-120"/>
+              </a:rPr>
+              <a:t> · i multiplexer</a:t>
+            </a:r>
+            <a:endParaRPr lang="en-US" sz="1100" dirty="0"/>
+          </a:p>
+        </p:txBody>
+      </p:sp>
+      <p:pic>
+        <p:nvPicPr>
+          <p:cNvPr id="18" name="Image 1" descr="preencoded.png">    </p:cNvPr>
+          <p:cNvPicPr>
+            <a:picLocks noChangeAspect="1"/>
+          </p:cNvPicPr>
+          <p:nvPr/>
+        </p:nvPicPr>
+        <p:blipFill>
+          <a:blip r:embed="rId2"/>
+          <a:stretch>
+            <a:fillRect/>
+          </a:stretch>
+        </p:blipFill>
+        <p:spPr>
+          <a:xfrm>
             <a:off x="6583680" y="2347036"/>
             <a:ext cx="4876495" cy="2438248"/>
           </a:xfrm>
@@ -11457,7 +12269,7 @@
       </p:pic>
       <p:sp>
         <p:nvSpPr>
-          <p:cNvPr id="15" name="Text 11"/>
+          <p:cNvPr id="19" name="Text 14"/>
           <p:cNvSpPr txBox="1"/>
           <p:nvPr/>
         </p:nvSpPr>
@@ -14084,6 +14896,133 @@
       </p:sp>
       <p:sp>
         <p:nvSpPr>
+          <p:cNvPr id="15" name="Shape 12"/>
+          <p:cNvSpPr/>
+          <p:nvPr/>
+        </p:nvSpPr>
+        <p:spPr>
+          <a:xfrm>
+            <a:off x="8379917" y="91440"/>
+            <a:ext cx="3263138" cy="274320"/>
+          </a:xfrm>
+          <a:prstGeom prst="rect">
+            <a:avLst/>
+          </a:prstGeom>
+          <a:solidFill>
+            <a:srgbClr val="E0F2FE"/>
+          </a:solidFill>
+          <a:ln w="12700">
+            <a:solidFill>
+              <a:srgbClr val="0369A1"/>
+            </a:solidFill>
+            <a:prstDash val="solid"/>
+          </a:ln>
+        </p:spPr>
+      </p:sp>
+      <p:sp>
+        <p:nvSpPr>
+          <p:cNvPr id="16" name="Shape 13"/>
+          <p:cNvSpPr/>
+          <p:nvPr/>
+        </p:nvSpPr>
+        <p:spPr>
+          <a:xfrm>
+            <a:off x="8379917" y="91440"/>
+            <a:ext cx="73152" cy="274320"/>
+          </a:xfrm>
+          <a:prstGeom prst="rect">
+            <a:avLst/>
+          </a:prstGeom>
+          <a:solidFill>
+            <a:srgbClr val="0369A1"/>
+          </a:solidFill>
+          <a:ln w="12700">
+            <a:solidFill>
+              <a:srgbClr val="0369A1"/>
+            </a:solidFill>
+            <a:prstDash val="solid"/>
+          </a:ln>
+        </p:spPr>
+      </p:sp>
+      <p:pic>
+        <p:nvPicPr>
+          <p:cNvPr id="17" name="Image 0" descr="preencoded.png">    </p:cNvPr>
+          <p:cNvPicPr>
+            <a:picLocks noChangeAspect="1"/>
+          </p:cNvPicPr>
+          <p:nvPr/>
+        </p:nvPicPr>
+        <p:blipFill>
+          <a:blip r:embed="rId1"/>
+          <a:stretch>
+            <a:fillRect/>
+          </a:stretch>
+        </p:blipFill>
+        <p:spPr>
+          <a:xfrm>
+            <a:off x="8507933" y="128016"/>
+            <a:ext cx="201168" cy="201168"/>
+          </a:xfrm>
+          <a:prstGeom prst="rect">
+            <a:avLst/>
+          </a:prstGeom>
+        </p:spPr>
+      </p:pic>
+      <p:sp>
+        <p:nvSpPr>
+          <p:cNvPr id="18" name="Text 14"/>
+          <p:cNvSpPr txBox="1"/>
+          <p:nvPr/>
+        </p:nvSpPr>
+        <p:spPr>
+          <a:xfrm>
+            <a:off x="8763965" y="91440"/>
+            <a:ext cx="2842514" cy="274320"/>
+          </a:xfrm>
+          <a:prstGeom prst="rect">
+            <a:avLst/>
+          </a:prstGeom>
+          <a:noFill/>
+          <a:ln/>
+        </p:spPr>
+        <p:txBody>
+          <a:bodyPr wrap="square" lIns="0" tIns="0" rIns="0" bIns="0" rtlCol="0" anchor="ctr"/>
+          <a:lstStyle/>
+          <a:p>
+            <a:pPr indent="0" marL="0">
+              <a:buNone/>
+            </a:pPr>
+            <a:r>
+              <a:rPr lang="en-US" sz="1100" b="1" dirty="0">
+                <a:solidFill>
+                  <a:srgbClr val="075985"/>
+                </a:solidFill>
+                <a:latin typeface="Calibri" pitchFamily="34" charset="0"/>
+                <a:ea typeface="Calibri" pitchFamily="34" charset="-122"/>
+                <a:cs typeface="Calibri" pitchFamily="34" charset="-120"/>
+              </a:rPr>
+              <a:t>DA COMPRENDERE OGGI</a:t>
+            </a:r>
+            <a:pPr indent="0" marL="0">
+              <a:buNone/>
+            </a:pPr>
+            <a:r>
+              <a:rPr lang="en-US" sz="1100" dirty="0">
+                <a:solidFill>
+                  <a:srgbClr val="075985"/>
+                </a:solidFill>
+                <a:latin typeface="Calibri" pitchFamily="34" charset="0"/>
+                <a:ea typeface="Calibri" pitchFamily="34" charset="-122"/>
+                <a:cs typeface="Calibri" pitchFamily="34" charset="-120"/>
+              </a:rPr>
+              <a:t> · i multiplexer</a:t>
+            </a:r>
+            <a:endParaRPr lang="en-US" sz="1100" dirty="0"/>
+          </a:p>
+        </p:txBody>
+      </p:sp>
+      <p:sp>
+        <p:nvSpPr>
           <p:cNvPr id="25" name="Slide Number Placeholder 0"/>
           <p:cNvSpPr>
             <a:spLocks noGrp="1"/>
@@ -14550,9 +15489,59 @@
           </a:ln>
         </p:spPr>
       </p:sp>
+      <p:sp>
+        <p:nvSpPr>
+          <p:cNvPr id="13" name="Shape 11"/>
+          <p:cNvSpPr/>
+          <p:nvPr/>
+        </p:nvSpPr>
+        <p:spPr>
+          <a:xfrm>
+            <a:off x="7920304" y="91440"/>
+            <a:ext cx="3722751" cy="274320"/>
+          </a:xfrm>
+          <a:prstGeom prst="rect">
+            <a:avLst/>
+          </a:prstGeom>
+          <a:solidFill>
+            <a:srgbClr val="E0F2FE"/>
+          </a:solidFill>
+          <a:ln w="12700">
+            <a:solidFill>
+              <a:srgbClr val="0369A1"/>
+            </a:solidFill>
+            <a:prstDash val="solid"/>
+          </a:ln>
+        </p:spPr>
+      </p:sp>
+      <p:sp>
+        <p:nvSpPr>
+          <p:cNvPr id="14" name="Shape 12"/>
+          <p:cNvSpPr/>
+          <p:nvPr/>
+        </p:nvSpPr>
+        <p:spPr>
+          <a:xfrm>
+            <a:off x="7920304" y="91440"/>
+            <a:ext cx="73152" cy="274320"/>
+          </a:xfrm>
+          <a:prstGeom prst="rect">
+            <a:avLst/>
+          </a:prstGeom>
+          <a:solidFill>
+            <a:srgbClr val="0369A1"/>
+          </a:solidFill>
+          <a:ln w="12700">
+            <a:solidFill>
+              <a:srgbClr val="0369A1"/>
+            </a:solidFill>
+            <a:prstDash val="solid"/>
+          </a:ln>
+        </p:spPr>
+      </p:sp>
       <p:pic>
         <p:nvPicPr>
-          <p:cNvPr id="14" name="Image 0" descr="preencoded.png">    </p:cNvPr>
+          <p:cNvPr id="15" name="Image 0" descr="preencoded.png">    </p:cNvPr>
           <p:cNvPicPr>
             <a:picLocks noChangeAspect="1"/>
           </p:cNvPicPr>
@@ -14566,6 +15555,83 @@
         </p:blipFill>
         <p:spPr>
           <a:xfrm>
+            <a:off x="8048320" y="128016"/>
+            <a:ext cx="201168" cy="201168"/>
+          </a:xfrm>
+          <a:prstGeom prst="rect">
+            <a:avLst/>
+          </a:prstGeom>
+        </p:spPr>
+      </p:pic>
+      <p:sp>
+        <p:nvSpPr>
+          <p:cNvPr id="16" name="Text 13"/>
+          <p:cNvSpPr txBox="1"/>
+          <p:nvPr/>
+        </p:nvSpPr>
+        <p:spPr>
+          <a:xfrm>
+            <a:off x="8304352" y="91440"/>
+            <a:ext cx="3302127" cy="274320"/>
+          </a:xfrm>
+          <a:prstGeom prst="rect">
+            <a:avLst/>
+          </a:prstGeom>
+          <a:noFill/>
+          <a:ln/>
+        </p:spPr>
+        <p:txBody>
+          <a:bodyPr wrap="square" lIns="0" tIns="0" rIns="0" bIns="0" rtlCol="0" anchor="ctr"/>
+          <a:lstStyle/>
+          <a:p>
+            <a:pPr indent="0" marL="0">
+              <a:buNone/>
+            </a:pPr>
+            <a:r>
+              <a:rPr lang="en-US" sz="1100" b="1" dirty="0">
+                <a:solidFill>
+                  <a:srgbClr val="075985"/>
+                </a:solidFill>
+                <a:latin typeface="Calibri" pitchFamily="34" charset="0"/>
+                <a:ea typeface="Calibri" pitchFamily="34" charset="-122"/>
+                <a:cs typeface="Calibri" pitchFamily="34" charset="-120"/>
+              </a:rPr>
+              <a:t>DA COMPRENDERE OGGI</a:t>
+            </a:r>
+            <a:pPr indent="0" marL="0">
+              <a:buNone/>
+            </a:pPr>
+            <a:r>
+              <a:rPr lang="en-US" sz="1100" dirty="0">
+                <a:solidFill>
+                  <a:srgbClr val="075985"/>
+                </a:solidFill>
+                <a:latin typeface="Calibri" pitchFamily="34" charset="0"/>
+                <a:ea typeface="Calibri" pitchFamily="34" charset="-122"/>
+                <a:cs typeface="Calibri" pitchFamily="34" charset="-120"/>
+              </a:rPr>
+              <a:t> · comparatori e parità</a:t>
+            </a:r>
+            <a:endParaRPr lang="en-US" sz="1100" dirty="0"/>
+          </a:p>
+        </p:txBody>
+      </p:sp>
+      <p:pic>
+        <p:nvPicPr>
+          <p:cNvPr id="18" name="Image 1" descr="preencoded.png">    </p:cNvPr>
+          <p:cNvPicPr>
+            <a:picLocks noChangeAspect="1"/>
+          </p:cNvPicPr>
+          <p:nvPr/>
+        </p:nvPicPr>
+        <p:blipFill>
+          <a:blip r:embed="rId2"/>
+          <a:stretch>
+            <a:fillRect/>
+          </a:stretch>
+        </p:blipFill>
+        <p:spPr>
+          <a:xfrm>
             <a:off x="7132320" y="2618778"/>
             <a:ext cx="4327855" cy="1894765"/>
           </a:xfrm>
@@ -14576,7 +15642,7 @@
       </p:pic>
       <p:sp>
         <p:nvSpPr>
-          <p:cNvPr id="15" name="Text 11"/>
+          <p:cNvPr id="19" name="Text 14"/>
           <p:cNvSpPr txBox="1"/>
           <p:nvPr/>
         </p:nvSpPr>
@@ -15162,6 +16228,133 @@
       </p:sp>
       <p:sp>
         <p:nvSpPr>
+          <p:cNvPr id="14" name="Shape 12"/>
+          <p:cNvSpPr/>
+          <p:nvPr/>
+        </p:nvSpPr>
+        <p:spPr>
+          <a:xfrm>
+            <a:off x="7920304" y="91440"/>
+            <a:ext cx="3722751" cy="274320"/>
+          </a:xfrm>
+          <a:prstGeom prst="rect">
+            <a:avLst/>
+          </a:prstGeom>
+          <a:solidFill>
+            <a:srgbClr val="E0F2FE"/>
+          </a:solidFill>
+          <a:ln w="12700">
+            <a:solidFill>
+              <a:srgbClr val="0369A1"/>
+            </a:solidFill>
+            <a:prstDash val="solid"/>
+          </a:ln>
+        </p:spPr>
+      </p:sp>
+      <p:sp>
+        <p:nvSpPr>
+          <p:cNvPr id="15" name="Shape 13"/>
+          <p:cNvSpPr/>
+          <p:nvPr/>
+        </p:nvSpPr>
+        <p:spPr>
+          <a:xfrm>
+            <a:off x="7920304" y="91440"/>
+            <a:ext cx="73152" cy="274320"/>
+          </a:xfrm>
+          <a:prstGeom prst="rect">
+            <a:avLst/>
+          </a:prstGeom>
+          <a:solidFill>
+            <a:srgbClr val="0369A1"/>
+          </a:solidFill>
+          <a:ln w="12700">
+            <a:solidFill>
+              <a:srgbClr val="0369A1"/>
+            </a:solidFill>
+            <a:prstDash val="solid"/>
+          </a:ln>
+        </p:spPr>
+      </p:sp>
+      <p:pic>
+        <p:nvPicPr>
+          <p:cNvPr id="16" name="Image 0" descr="preencoded.png">    </p:cNvPr>
+          <p:cNvPicPr>
+            <a:picLocks noChangeAspect="1"/>
+          </p:cNvPicPr>
+          <p:nvPr/>
+        </p:nvPicPr>
+        <p:blipFill>
+          <a:blip r:embed="rId1"/>
+          <a:stretch>
+            <a:fillRect/>
+          </a:stretch>
+        </p:blipFill>
+        <p:spPr>
+          <a:xfrm>
+            <a:off x="8048320" y="128016"/>
+            <a:ext cx="201168" cy="201168"/>
+          </a:xfrm>
+          <a:prstGeom prst="rect">
+            <a:avLst/>
+          </a:prstGeom>
+        </p:spPr>
+      </p:pic>
+      <p:sp>
+        <p:nvSpPr>
+          <p:cNvPr id="17" name="Text 14"/>
+          <p:cNvSpPr txBox="1"/>
+          <p:nvPr/>
+        </p:nvSpPr>
+        <p:spPr>
+          <a:xfrm>
+            <a:off x="8304352" y="91440"/>
+            <a:ext cx="3302127" cy="274320"/>
+          </a:xfrm>
+          <a:prstGeom prst="rect">
+            <a:avLst/>
+          </a:prstGeom>
+          <a:noFill/>
+          <a:ln/>
+        </p:spPr>
+        <p:txBody>
+          <a:bodyPr wrap="square" lIns="0" tIns="0" rIns="0" bIns="0" rtlCol="0" anchor="ctr"/>
+          <a:lstStyle/>
+          <a:p>
+            <a:pPr indent="0" marL="0">
+              <a:buNone/>
+            </a:pPr>
+            <a:r>
+              <a:rPr lang="en-US" sz="1100" b="1" dirty="0">
+                <a:solidFill>
+                  <a:srgbClr val="075985"/>
+                </a:solidFill>
+                <a:latin typeface="Calibri" pitchFamily="34" charset="0"/>
+                <a:ea typeface="Calibri" pitchFamily="34" charset="-122"/>
+                <a:cs typeface="Calibri" pitchFamily="34" charset="-120"/>
+              </a:rPr>
+              <a:t>DA COMPRENDERE OGGI</a:t>
+            </a:r>
+            <a:pPr indent="0" marL="0">
+              <a:buNone/>
+            </a:pPr>
+            <a:r>
+              <a:rPr lang="en-US" sz="1100" dirty="0">
+                <a:solidFill>
+                  <a:srgbClr val="075985"/>
+                </a:solidFill>
+                <a:latin typeface="Calibri" pitchFamily="34" charset="0"/>
+                <a:ea typeface="Calibri" pitchFamily="34" charset="-122"/>
+                <a:cs typeface="Calibri" pitchFamily="34" charset="-120"/>
+              </a:rPr>
+              <a:t> · comparatori e parità</a:t>
+            </a:r>
+            <a:endParaRPr lang="en-US" sz="1100" dirty="0"/>
+          </a:p>
+        </p:txBody>
+      </p:sp>
+      <p:sp>
+        <p:nvSpPr>
           <p:cNvPr id="25" name="Slide Number Placeholder 0"/>
           <p:cNvSpPr>
             <a:spLocks noGrp="1"/>
@@ -16347,6 +17540,133 @@
               <a:t>Nessuna memoria, da nessuna parte: la ALU è un'unica grande macchina combinatoria. Il suo percorso più lento, la catena dei riporti dell'addizionatore, limita il clock del processore.</a:t>
             </a:r>
             <a:endParaRPr lang="en-US" sz="1400" dirty="0"/>
+          </a:p>
+        </p:txBody>
+      </p:sp>
+      <p:sp>
+        <p:nvSpPr>
+          <p:cNvPr id="36" name="Shape 34"/>
+          <p:cNvSpPr/>
+          <p:nvPr/>
+        </p:nvSpPr>
+        <p:spPr>
+          <a:xfrm>
+            <a:off x="8905189" y="91440"/>
+            <a:ext cx="2737866" cy="274320"/>
+          </a:xfrm>
+          <a:prstGeom prst="rect">
+            <a:avLst/>
+          </a:prstGeom>
+          <a:solidFill>
+            <a:srgbClr val="E0F2FE"/>
+          </a:solidFill>
+          <a:ln w="12700">
+            <a:solidFill>
+              <a:srgbClr val="0369A1"/>
+            </a:solidFill>
+            <a:prstDash val="solid"/>
+          </a:ln>
+        </p:spPr>
+      </p:sp>
+      <p:sp>
+        <p:nvSpPr>
+          <p:cNvPr id="37" name="Shape 35"/>
+          <p:cNvSpPr/>
+          <p:nvPr/>
+        </p:nvSpPr>
+        <p:spPr>
+          <a:xfrm>
+            <a:off x="8905189" y="91440"/>
+            <a:ext cx="73152" cy="274320"/>
+          </a:xfrm>
+          <a:prstGeom prst="rect">
+            <a:avLst/>
+          </a:prstGeom>
+          <a:solidFill>
+            <a:srgbClr val="0369A1"/>
+          </a:solidFill>
+          <a:ln w="12700">
+            <a:solidFill>
+              <a:srgbClr val="0369A1"/>
+            </a:solidFill>
+            <a:prstDash val="solid"/>
+          </a:ln>
+        </p:spPr>
+      </p:sp>
+      <p:pic>
+        <p:nvPicPr>
+          <p:cNvPr id="38" name="Image 0" descr="preencoded.png">    </p:cNvPr>
+          <p:cNvPicPr>
+            <a:picLocks noChangeAspect="1"/>
+          </p:cNvPicPr>
+          <p:nvPr/>
+        </p:nvPicPr>
+        <p:blipFill>
+          <a:blip r:embed="rId1"/>
+          <a:stretch>
+            <a:fillRect/>
+          </a:stretch>
+        </p:blipFill>
+        <p:spPr>
+          <a:xfrm>
+            <a:off x="9033205" y="128016"/>
+            <a:ext cx="201168" cy="201168"/>
+          </a:xfrm>
+          <a:prstGeom prst="rect">
+            <a:avLst/>
+          </a:prstGeom>
+        </p:spPr>
+      </p:pic>
+      <p:sp>
+        <p:nvSpPr>
+          <p:cNvPr id="39" name="Text 36"/>
+          <p:cNvSpPr txBox="1"/>
+          <p:nvPr/>
+        </p:nvSpPr>
+        <p:spPr>
+          <a:xfrm>
+            <a:off x="9289237" y="91440"/>
+            <a:ext cx="2317242" cy="274320"/>
+          </a:xfrm>
+          <a:prstGeom prst="rect">
+            <a:avLst/>
+          </a:prstGeom>
+          <a:noFill/>
+          <a:ln/>
+        </p:spPr>
+        <p:txBody>
+          <a:bodyPr wrap="square" lIns="0" tIns="0" rIns="0" bIns="0" rtlCol="0" anchor="ctr"/>
+          <a:lstStyle/>
+          <a:p>
+            <a:pPr indent="0" marL="0">
+              <a:buNone/>
+            </a:pPr>
+            <a:r>
+              <a:rPr lang="en-US" sz="1100" b="1" dirty="0">
+                <a:solidFill>
+                  <a:srgbClr val="075985"/>
+                </a:solidFill>
+                <a:latin typeface="Calibri" pitchFamily="34" charset="0"/>
+                <a:ea typeface="Calibri" pitchFamily="34" charset="-122"/>
+                <a:cs typeface="Calibri" pitchFamily="34" charset="-120"/>
+              </a:rPr>
+              <a:t>DA COMPRENDERE OGGI</a:t>
+            </a:r>
+            <a:pPr indent="0" marL="0">
+              <a:buNone/>
+            </a:pPr>
+            <a:r>
+              <a:rPr lang="en-US" sz="1100" dirty="0">
+                <a:solidFill>
+                  <a:srgbClr val="075985"/>
+                </a:solidFill>
+                <a:latin typeface="Calibri" pitchFamily="34" charset="0"/>
+                <a:ea typeface="Calibri" pitchFamily="34" charset="-122"/>
+                <a:cs typeface="Calibri" pitchFamily="34" charset="-120"/>
+              </a:rPr>
+              <a:t> · l'ALU</a:t>
+            </a:r>
+            <a:endParaRPr lang="en-US" sz="1100" dirty="0"/>
           </a:p>
         </p:txBody>
       </p:sp>
@@ -22494,6 +23814,324 @@
       </p:sp>
       <p:sp>
         <p:nvSpPr>
+          <p:cNvPr id="9" name="Shape 7"/>
+          <p:cNvSpPr/>
+          <p:nvPr/>
+        </p:nvSpPr>
+        <p:spPr>
+          <a:xfrm>
+            <a:off x="6241110" y="91440"/>
+            <a:ext cx="5401945" cy="274320"/>
+          </a:xfrm>
+          <a:prstGeom prst="rect">
+            <a:avLst/>
+          </a:prstGeom>
+          <a:solidFill>
+            <a:srgbClr val="F3E8FF"/>
+          </a:solidFill>
+          <a:ln w="12700">
+            <a:solidFill>
+              <a:srgbClr val="7E22CE"/>
+            </a:solidFill>
+            <a:prstDash val="dash"/>
+          </a:ln>
+        </p:spPr>
+      </p:sp>
+      <p:sp>
+        <p:nvSpPr>
+          <p:cNvPr id="10" name="Shape 8"/>
+          <p:cNvSpPr/>
+          <p:nvPr/>
+        </p:nvSpPr>
+        <p:spPr>
+          <a:xfrm>
+            <a:off x="6268542" y="128016"/>
+            <a:ext cx="45720" cy="45720"/>
+          </a:xfrm>
+          <a:prstGeom prst="rect">
+            <a:avLst/>
+          </a:prstGeom>
+          <a:solidFill>
+            <a:srgbClr val="7E22CE"/>
+          </a:solidFill>
+          <a:ln w="12700">
+            <a:solidFill>
+              <a:srgbClr val="7E22CE"/>
+            </a:solidFill>
+            <a:prstDash val="solid"/>
+          </a:ln>
+        </p:spPr>
+      </p:sp>
+      <p:sp>
+        <p:nvSpPr>
+          <p:cNvPr id="11" name="Shape 9"/>
+          <p:cNvSpPr/>
+          <p:nvPr/>
+        </p:nvSpPr>
+        <p:spPr>
+          <a:xfrm>
+            <a:off x="6268542" y="205740"/>
+            <a:ext cx="45720" cy="45720"/>
+          </a:xfrm>
+          <a:prstGeom prst="rect">
+            <a:avLst/>
+          </a:prstGeom>
+          <a:solidFill>
+            <a:srgbClr val="7E22CE"/>
+          </a:solidFill>
+          <a:ln w="12700">
+            <a:solidFill>
+              <a:srgbClr val="7E22CE"/>
+            </a:solidFill>
+            <a:prstDash val="solid"/>
+          </a:ln>
+        </p:spPr>
+      </p:sp>
+      <p:sp>
+        <p:nvSpPr>
+          <p:cNvPr id="12" name="Shape 10"/>
+          <p:cNvSpPr/>
+          <p:nvPr/>
+        </p:nvSpPr>
+        <p:spPr>
+          <a:xfrm>
+            <a:off x="6268542" y="283464"/>
+            <a:ext cx="45720" cy="45720"/>
+          </a:xfrm>
+          <a:prstGeom prst="rect">
+            <a:avLst/>
+          </a:prstGeom>
+          <a:solidFill>
+            <a:srgbClr val="7E22CE"/>
+          </a:solidFill>
+          <a:ln w="12700">
+            <a:solidFill>
+              <a:srgbClr val="7E22CE"/>
+            </a:solidFill>
+            <a:prstDash val="solid"/>
+          </a:ln>
+        </p:spPr>
+      </p:sp>
+      <p:pic>
+        <p:nvPicPr>
+          <p:cNvPr id="13" name="Image 0" descr="preencoded.png">    </p:cNvPr>
+          <p:cNvPicPr>
+            <a:picLocks noChangeAspect="1"/>
+          </p:cNvPicPr>
+          <p:nvPr/>
+        </p:nvPicPr>
+        <p:blipFill>
+          <a:blip r:embed="rId1"/>
+          <a:stretch>
+            <a:fillRect/>
+          </a:stretch>
+        </p:blipFill>
+        <p:spPr>
+          <a:xfrm>
+            <a:off x="6369126" y="128016"/>
+            <a:ext cx="201168" cy="201168"/>
+          </a:xfrm>
+          <a:prstGeom prst="rect">
+            <a:avLst/>
+          </a:prstGeom>
+        </p:spPr>
+      </p:pic>
+      <p:sp>
+        <p:nvSpPr>
+          <p:cNvPr id="14" name="Text 11"/>
+          <p:cNvSpPr txBox="1"/>
+          <p:nvPr/>
+        </p:nvSpPr>
+        <p:spPr>
+          <a:xfrm>
+            <a:off x="6625158" y="91440"/>
+            <a:ext cx="4981321" cy="274320"/>
+          </a:xfrm>
+          <a:prstGeom prst="rect">
+            <a:avLst/>
+          </a:prstGeom>
+          <a:noFill/>
+          <a:ln/>
+        </p:spPr>
+        <p:txBody>
+          <a:bodyPr wrap="square" lIns="0" tIns="0" rIns="0" bIns="0" rtlCol="0" anchor="ctr"/>
+          <a:lstStyle/>
+          <a:p>
+            <a:pPr indent="0" marL="0">
+              <a:buNone/>
+            </a:pPr>
+            <a:r>
+              <a:rPr lang="en-US" sz="1100" b="1" dirty="0">
+                <a:solidFill>
+                  <a:srgbClr val="6B21A8"/>
+                </a:solidFill>
+                <a:latin typeface="Calibri" pitchFamily="34" charset="0"/>
+                <a:ea typeface="Calibri" pitchFamily="34" charset="-122"/>
+                <a:cs typeface="Calibri" pitchFamily="34" charset="-120"/>
+              </a:rPr>
+              <a:t>DA COMPRENDERE PIÙ AVANTI</a:t>
+            </a:r>
+            <a:pPr indent="0" marL="0">
+              <a:buNone/>
+            </a:pPr>
+            <a:r>
+              <a:rPr lang="en-US" sz="1100" dirty="0">
+                <a:solidFill>
+                  <a:srgbClr val="6B21A8"/>
+                </a:solidFill>
+                <a:latin typeface="Calibri" pitchFamily="34" charset="0"/>
+                <a:ea typeface="Calibri" pitchFamily="34" charset="-122"/>
+                <a:cs typeface="Calibri" pitchFamily="34" charset="-120"/>
+              </a:rPr>
+              <a:t> · macchine a stati finiti</a:t>
+            </a:r>
+            <a:pPr indent="0" marL="0">
+              <a:buNone/>
+            </a:pPr>
+            <a:r>
+              <a:rPr lang="en-US" sz="1100" b="1" dirty="0">
+                <a:solidFill>
+                  <a:srgbClr val="6B21A8"/>
+                </a:solidFill>
+                <a:latin typeface="Calibri" pitchFamily="34" charset="0"/>
+                <a:ea typeface="Calibri" pitchFamily="34" charset="-122"/>
+                <a:cs typeface="Calibri" pitchFamily="34" charset="-120"/>
+              </a:rPr>
+              <a:t> → Lezione 13</a:t>
+            </a:r>
+            <a:endParaRPr lang="en-US" sz="1100" dirty="0"/>
+          </a:p>
+        </p:txBody>
+      </p:sp>
+      <p:sp>
+        <p:nvSpPr>
+          <p:cNvPr id="15" name="Shape 12"/>
+          <p:cNvSpPr/>
+          <p:nvPr/>
+        </p:nvSpPr>
+        <p:spPr>
+          <a:xfrm>
+            <a:off x="2408631" y="91440"/>
+            <a:ext cx="3722751" cy="274320"/>
+          </a:xfrm>
+          <a:prstGeom prst="rect">
+            <a:avLst/>
+          </a:prstGeom>
+          <a:solidFill>
+            <a:srgbClr val="E0F2FE"/>
+          </a:solidFill>
+          <a:ln w="12700">
+            <a:solidFill>
+              <a:srgbClr val="0369A1"/>
+            </a:solidFill>
+            <a:prstDash val="solid"/>
+          </a:ln>
+        </p:spPr>
+      </p:sp>
+      <p:sp>
+        <p:nvSpPr>
+          <p:cNvPr id="16" name="Shape 13"/>
+          <p:cNvSpPr/>
+          <p:nvPr/>
+        </p:nvSpPr>
+        <p:spPr>
+          <a:xfrm>
+            <a:off x="2408631" y="91440"/>
+            <a:ext cx="73152" cy="274320"/>
+          </a:xfrm>
+          <a:prstGeom prst="rect">
+            <a:avLst/>
+          </a:prstGeom>
+          <a:solidFill>
+            <a:srgbClr val="0369A1"/>
+          </a:solidFill>
+          <a:ln w="12700">
+            <a:solidFill>
+              <a:srgbClr val="0369A1"/>
+            </a:solidFill>
+            <a:prstDash val="solid"/>
+          </a:ln>
+        </p:spPr>
+      </p:sp>
+      <p:pic>
+        <p:nvPicPr>
+          <p:cNvPr id="17" name="Image 1" descr="preencoded.png">    </p:cNvPr>
+          <p:cNvPicPr>
+            <a:picLocks noChangeAspect="1"/>
+          </p:cNvPicPr>
+          <p:nvPr/>
+        </p:nvPicPr>
+        <p:blipFill>
+          <a:blip r:embed="rId2"/>
+          <a:stretch>
+            <a:fillRect/>
+          </a:stretch>
+        </p:blipFill>
+        <p:spPr>
+          <a:xfrm>
+            <a:off x="2536647" y="128016"/>
+            <a:ext cx="201168" cy="201168"/>
+          </a:xfrm>
+          <a:prstGeom prst="rect">
+            <a:avLst/>
+          </a:prstGeom>
+        </p:spPr>
+      </p:pic>
+      <p:sp>
+        <p:nvSpPr>
+          <p:cNvPr id="18" name="Text 14"/>
+          <p:cNvSpPr txBox="1"/>
+          <p:nvPr/>
+        </p:nvSpPr>
+        <p:spPr>
+          <a:xfrm>
+            <a:off x="2792679" y="91440"/>
+            <a:ext cx="3302127" cy="274320"/>
+          </a:xfrm>
+          <a:prstGeom prst="rect">
+            <a:avLst/>
+          </a:prstGeom>
+          <a:noFill/>
+          <a:ln/>
+        </p:spPr>
+        <p:txBody>
+          <a:bodyPr wrap="square" lIns="0" tIns="0" rIns="0" bIns="0" rtlCol="0" anchor="ctr"/>
+          <a:lstStyle/>
+          <a:p>
+            <a:pPr indent="0" marL="0">
+              <a:buNone/>
+            </a:pPr>
+            <a:r>
+              <a:rPr lang="en-US" sz="1100" b="1" dirty="0">
+                <a:solidFill>
+                  <a:srgbClr val="075985"/>
+                </a:solidFill>
+                <a:latin typeface="Calibri" pitchFamily="34" charset="0"/>
+                <a:ea typeface="Calibri" pitchFamily="34" charset="-122"/>
+                <a:cs typeface="Calibri" pitchFamily="34" charset="-120"/>
+              </a:rPr>
+              <a:t>DA COMPRENDERE OGGI</a:t>
+            </a:r>
+            <a:pPr indent="0" marL="0">
+              <a:buNone/>
+            </a:pPr>
+            <a:r>
+              <a:rPr lang="en-US" sz="1100" dirty="0">
+                <a:solidFill>
+                  <a:srgbClr val="075985"/>
+                </a:solidFill>
+                <a:latin typeface="Calibri" pitchFamily="34" charset="0"/>
+                <a:ea typeface="Calibri" pitchFamily="34" charset="-122"/>
+                <a:cs typeface="Calibri" pitchFamily="34" charset="-120"/>
+              </a:rPr>
+              <a:t> · le reti combinatorie</a:t>
+            </a:r>
+            <a:endParaRPr lang="en-US" sz="1100" dirty="0"/>
+          </a:p>
+        </p:txBody>
+      </p:sp>
+      <p:sp>
+        <p:nvSpPr>
           <p:cNvPr id="25" name="Slide Number Placeholder 0"/>
           <p:cNvSpPr>
             <a:spLocks noGrp="1"/>
@@ -23048,6 +24686,133 @@
       </p:sp>
       <p:sp>
         <p:nvSpPr>
+          <p:cNvPr id="16" name="Shape 14"/>
+          <p:cNvSpPr/>
+          <p:nvPr/>
+        </p:nvSpPr>
+        <p:spPr>
+          <a:xfrm>
+            <a:off x="7920304" y="91440"/>
+            <a:ext cx="3722751" cy="274320"/>
+          </a:xfrm>
+          <a:prstGeom prst="rect">
+            <a:avLst/>
+          </a:prstGeom>
+          <a:solidFill>
+            <a:srgbClr val="E0F2FE"/>
+          </a:solidFill>
+          <a:ln w="12700">
+            <a:solidFill>
+              <a:srgbClr val="0369A1"/>
+            </a:solidFill>
+            <a:prstDash val="solid"/>
+          </a:ln>
+        </p:spPr>
+      </p:sp>
+      <p:sp>
+        <p:nvSpPr>
+          <p:cNvPr id="17" name="Shape 15"/>
+          <p:cNvSpPr/>
+          <p:nvPr/>
+        </p:nvSpPr>
+        <p:spPr>
+          <a:xfrm>
+            <a:off x="7920304" y="91440"/>
+            <a:ext cx="73152" cy="274320"/>
+          </a:xfrm>
+          <a:prstGeom prst="rect">
+            <a:avLst/>
+          </a:prstGeom>
+          <a:solidFill>
+            <a:srgbClr val="0369A1"/>
+          </a:solidFill>
+          <a:ln w="12700">
+            <a:solidFill>
+              <a:srgbClr val="0369A1"/>
+            </a:solidFill>
+            <a:prstDash val="solid"/>
+          </a:ln>
+        </p:spPr>
+      </p:sp>
+      <p:pic>
+        <p:nvPicPr>
+          <p:cNvPr id="18" name="Image 0" descr="preencoded.png">    </p:cNvPr>
+          <p:cNvPicPr>
+            <a:picLocks noChangeAspect="1"/>
+          </p:cNvPicPr>
+          <p:nvPr/>
+        </p:nvPicPr>
+        <p:blipFill>
+          <a:blip r:embed="rId1"/>
+          <a:stretch>
+            <a:fillRect/>
+          </a:stretch>
+        </p:blipFill>
+        <p:spPr>
+          <a:xfrm>
+            <a:off x="8048320" y="128016"/>
+            <a:ext cx="201168" cy="201168"/>
+          </a:xfrm>
+          <a:prstGeom prst="rect">
+            <a:avLst/>
+          </a:prstGeom>
+        </p:spPr>
+      </p:pic>
+      <p:sp>
+        <p:nvSpPr>
+          <p:cNvPr id="19" name="Text 16"/>
+          <p:cNvSpPr txBox="1"/>
+          <p:nvPr/>
+        </p:nvSpPr>
+        <p:spPr>
+          <a:xfrm>
+            <a:off x="8304352" y="91440"/>
+            <a:ext cx="3302127" cy="274320"/>
+          </a:xfrm>
+          <a:prstGeom prst="rect">
+            <a:avLst/>
+          </a:prstGeom>
+          <a:noFill/>
+          <a:ln/>
+        </p:spPr>
+        <p:txBody>
+          <a:bodyPr wrap="square" lIns="0" tIns="0" rIns="0" bIns="0" rtlCol="0" anchor="ctr"/>
+          <a:lstStyle/>
+          <a:p>
+            <a:pPr indent="0" marL="0">
+              <a:buNone/>
+            </a:pPr>
+            <a:r>
+              <a:rPr lang="en-US" sz="1100" b="1" dirty="0">
+                <a:solidFill>
+                  <a:srgbClr val="075985"/>
+                </a:solidFill>
+                <a:latin typeface="Calibri" pitchFamily="34" charset="0"/>
+                <a:ea typeface="Calibri" pitchFamily="34" charset="-122"/>
+                <a:cs typeface="Calibri" pitchFamily="34" charset="-120"/>
+              </a:rPr>
+              <a:t>DA COMPRENDERE OGGI</a:t>
+            </a:r>
+            <a:pPr indent="0" marL="0">
+              <a:buNone/>
+            </a:pPr>
+            <a:r>
+              <a:rPr lang="en-US" sz="1100" dirty="0">
+                <a:solidFill>
+                  <a:srgbClr val="075985"/>
+                </a:solidFill>
+                <a:latin typeface="Calibri" pitchFamily="34" charset="0"/>
+                <a:ea typeface="Calibri" pitchFamily="34" charset="-122"/>
+                <a:cs typeface="Calibri" pitchFamily="34" charset="-120"/>
+              </a:rPr>
+              <a:t> · le reti combinatorie</a:t>
+            </a:r>
+            <a:endParaRPr lang="en-US" sz="1100" dirty="0"/>
+          </a:p>
+        </p:txBody>
+      </p:sp>
+      <p:sp>
+        <p:nvSpPr>
           <p:cNvPr id="25" name="Slide Number Placeholder 0"/>
           <p:cNvSpPr>
             <a:spLocks noGrp="1"/>
@@ -23530,6 +25295,133 @@
               <a:t>Codice incompleto: N non è una potenza di k, e restano non assegnate k^m - N parole</a:t>
             </a:r>
             <a:endParaRPr lang="en-US" sz="1900" dirty="0"/>
+          </a:p>
+        </p:txBody>
+      </p:sp>
+      <p:sp>
+        <p:nvSpPr>
+          <p:cNvPr id="14" name="Shape 12"/>
+          <p:cNvSpPr/>
+          <p:nvPr/>
+        </p:nvSpPr>
+        <p:spPr>
+          <a:xfrm>
+            <a:off x="8708212" y="91440"/>
+            <a:ext cx="2934843" cy="274320"/>
+          </a:xfrm>
+          <a:prstGeom prst="rect">
+            <a:avLst/>
+          </a:prstGeom>
+          <a:solidFill>
+            <a:srgbClr val="E0F2FE"/>
+          </a:solidFill>
+          <a:ln w="12700">
+            <a:solidFill>
+              <a:srgbClr val="0369A1"/>
+            </a:solidFill>
+            <a:prstDash val="solid"/>
+          </a:ln>
+        </p:spPr>
+      </p:sp>
+      <p:sp>
+        <p:nvSpPr>
+          <p:cNvPr id="15" name="Shape 13"/>
+          <p:cNvSpPr/>
+          <p:nvPr/>
+        </p:nvSpPr>
+        <p:spPr>
+          <a:xfrm>
+            <a:off x="8708212" y="91440"/>
+            <a:ext cx="73152" cy="274320"/>
+          </a:xfrm>
+          <a:prstGeom prst="rect">
+            <a:avLst/>
+          </a:prstGeom>
+          <a:solidFill>
+            <a:srgbClr val="0369A1"/>
+          </a:solidFill>
+          <a:ln w="12700">
+            <a:solidFill>
+              <a:srgbClr val="0369A1"/>
+            </a:solidFill>
+            <a:prstDash val="solid"/>
+          </a:ln>
+        </p:spPr>
+      </p:sp>
+      <p:pic>
+        <p:nvPicPr>
+          <p:cNvPr id="16" name="Image 0" descr="preencoded.png">    </p:cNvPr>
+          <p:cNvPicPr>
+            <a:picLocks noChangeAspect="1"/>
+          </p:cNvPicPr>
+          <p:nvPr/>
+        </p:nvPicPr>
+        <p:blipFill>
+          <a:blip r:embed="rId1"/>
+          <a:stretch>
+            <a:fillRect/>
+          </a:stretch>
+        </p:blipFill>
+        <p:spPr>
+          <a:xfrm>
+            <a:off x="8836228" y="128016"/>
+            <a:ext cx="201168" cy="201168"/>
+          </a:xfrm>
+          <a:prstGeom prst="rect">
+            <a:avLst/>
+          </a:prstGeom>
+        </p:spPr>
+      </p:pic>
+      <p:sp>
+        <p:nvSpPr>
+          <p:cNvPr id="17" name="Text 14"/>
+          <p:cNvSpPr txBox="1"/>
+          <p:nvPr/>
+        </p:nvSpPr>
+        <p:spPr>
+          <a:xfrm>
+            <a:off x="9092260" y="91440"/>
+            <a:ext cx="2514219" cy="274320"/>
+          </a:xfrm>
+          <a:prstGeom prst="rect">
+            <a:avLst/>
+          </a:prstGeom>
+          <a:noFill/>
+          <a:ln/>
+        </p:spPr>
+        <p:txBody>
+          <a:bodyPr wrap="square" lIns="0" tIns="0" rIns="0" bIns="0" rtlCol="0" anchor="ctr"/>
+          <a:lstStyle/>
+          <a:p>
+            <a:pPr indent="0" marL="0">
+              <a:buNone/>
+            </a:pPr>
+            <a:r>
+              <a:rPr lang="en-US" sz="1100" b="1" dirty="0">
+                <a:solidFill>
+                  <a:srgbClr val="075985"/>
+                </a:solidFill>
+                <a:latin typeface="Calibri" pitchFamily="34" charset="0"/>
+                <a:ea typeface="Calibri" pitchFamily="34" charset="-122"/>
+                <a:cs typeface="Calibri" pitchFamily="34" charset="-120"/>
+              </a:rPr>
+              <a:t>DA COMPRENDERE OGGI</a:t>
+            </a:r>
+            <a:pPr indent="0" marL="0">
+              <a:buNone/>
+            </a:pPr>
+            <a:r>
+              <a:rPr lang="en-US" sz="1100" dirty="0">
+                <a:solidFill>
+                  <a:srgbClr val="075985"/>
+                </a:solidFill>
+                <a:latin typeface="Calibri" pitchFamily="34" charset="0"/>
+                <a:ea typeface="Calibri" pitchFamily="34" charset="-122"/>
+                <a:cs typeface="Calibri" pitchFamily="34" charset="-120"/>
+              </a:rPr>
+              <a:t> · i codici</a:t>
+            </a:r>
+            <a:endParaRPr lang="en-US" sz="1100" dirty="0"/>
           </a:p>
         </p:txBody>
       </p:sp>
@@ -26182,6 +28074,133 @@
       </p:sp>
       <p:sp>
         <p:nvSpPr>
+          <p:cNvPr id="5" name="Shape 2"/>
+          <p:cNvSpPr/>
+          <p:nvPr/>
+        </p:nvSpPr>
+        <p:spPr>
+          <a:xfrm>
+            <a:off x="8708212" y="91440"/>
+            <a:ext cx="2934843" cy="274320"/>
+          </a:xfrm>
+          <a:prstGeom prst="rect">
+            <a:avLst/>
+          </a:prstGeom>
+          <a:solidFill>
+            <a:srgbClr val="E0F2FE"/>
+          </a:solidFill>
+          <a:ln w="12700">
+            <a:solidFill>
+              <a:srgbClr val="0369A1"/>
+            </a:solidFill>
+            <a:prstDash val="solid"/>
+          </a:ln>
+        </p:spPr>
+      </p:sp>
+      <p:sp>
+        <p:nvSpPr>
+          <p:cNvPr id="6" name="Shape 3"/>
+          <p:cNvSpPr/>
+          <p:nvPr/>
+        </p:nvSpPr>
+        <p:spPr>
+          <a:xfrm>
+            <a:off x="8708212" y="91440"/>
+            <a:ext cx="73152" cy="274320"/>
+          </a:xfrm>
+          <a:prstGeom prst="rect">
+            <a:avLst/>
+          </a:prstGeom>
+          <a:solidFill>
+            <a:srgbClr val="0369A1"/>
+          </a:solidFill>
+          <a:ln w="12700">
+            <a:solidFill>
+              <a:srgbClr val="0369A1"/>
+            </a:solidFill>
+            <a:prstDash val="solid"/>
+          </a:ln>
+        </p:spPr>
+      </p:sp>
+      <p:pic>
+        <p:nvPicPr>
+          <p:cNvPr id="7" name="Image 0" descr="preencoded.png">    </p:cNvPr>
+          <p:cNvPicPr>
+            <a:picLocks noChangeAspect="1"/>
+          </p:cNvPicPr>
+          <p:nvPr/>
+        </p:nvPicPr>
+        <p:blipFill>
+          <a:blip r:embed="rId1"/>
+          <a:stretch>
+            <a:fillRect/>
+          </a:stretch>
+        </p:blipFill>
+        <p:spPr>
+          <a:xfrm>
+            <a:off x="8836228" y="128016"/>
+            <a:ext cx="201168" cy="201168"/>
+          </a:xfrm>
+          <a:prstGeom prst="rect">
+            <a:avLst/>
+          </a:prstGeom>
+        </p:spPr>
+      </p:pic>
+      <p:sp>
+        <p:nvSpPr>
+          <p:cNvPr id="8" name="Text 4"/>
+          <p:cNvSpPr txBox="1"/>
+          <p:nvPr/>
+        </p:nvSpPr>
+        <p:spPr>
+          <a:xfrm>
+            <a:off x="9092260" y="91440"/>
+            <a:ext cx="2514219" cy="274320"/>
+          </a:xfrm>
+          <a:prstGeom prst="rect">
+            <a:avLst/>
+          </a:prstGeom>
+          <a:noFill/>
+          <a:ln/>
+        </p:spPr>
+        <p:txBody>
+          <a:bodyPr wrap="square" lIns="0" tIns="0" rIns="0" bIns="0" rtlCol="0" anchor="ctr"/>
+          <a:lstStyle/>
+          <a:p>
+            <a:pPr indent="0" marL="0">
+              <a:buNone/>
+            </a:pPr>
+            <a:r>
+              <a:rPr lang="en-US" sz="1100" b="1" dirty="0">
+                <a:solidFill>
+                  <a:srgbClr val="075985"/>
+                </a:solidFill>
+                <a:latin typeface="Calibri" pitchFamily="34" charset="0"/>
+                <a:ea typeface="Calibri" pitchFamily="34" charset="-122"/>
+                <a:cs typeface="Calibri" pitchFamily="34" charset="-120"/>
+              </a:rPr>
+              <a:t>DA COMPRENDERE OGGI</a:t>
+            </a:r>
+            <a:pPr indent="0" marL="0">
+              <a:buNone/>
+            </a:pPr>
+            <a:r>
+              <a:rPr lang="en-US" sz="1100" dirty="0">
+                <a:solidFill>
+                  <a:srgbClr val="075985"/>
+                </a:solidFill>
+                <a:latin typeface="Calibri" pitchFamily="34" charset="0"/>
+                <a:ea typeface="Calibri" pitchFamily="34" charset="-122"/>
+                <a:cs typeface="Calibri" pitchFamily="34" charset="-120"/>
+              </a:rPr>
+              <a:t> · i codici</a:t>
+            </a:r>
+            <a:endParaRPr lang="en-US" sz="1100" dirty="0"/>
+          </a:p>
+        </p:txBody>
+      </p:sp>
+      <p:sp>
+        <p:nvSpPr>
           <p:cNvPr id="25" name="Slide Number Placeholder 0"/>
           <p:cNvSpPr>
             <a:spLocks noGrp="1"/>
@@ -27708,6 +29727,133 @@
       </p:sp>
       <p:sp>
         <p:nvSpPr>
+          <p:cNvPr id="14" name="Shape 11"/>
+          <p:cNvSpPr/>
+          <p:nvPr/>
+        </p:nvSpPr>
+        <p:spPr>
+          <a:xfrm>
+            <a:off x="8708212" y="91440"/>
+            <a:ext cx="2934843" cy="274320"/>
+          </a:xfrm>
+          <a:prstGeom prst="rect">
+            <a:avLst/>
+          </a:prstGeom>
+          <a:solidFill>
+            <a:srgbClr val="E0F2FE"/>
+          </a:solidFill>
+          <a:ln w="12700">
+            <a:solidFill>
+              <a:srgbClr val="0369A1"/>
+            </a:solidFill>
+            <a:prstDash val="solid"/>
+          </a:ln>
+        </p:spPr>
+      </p:sp>
+      <p:sp>
+        <p:nvSpPr>
+          <p:cNvPr id="15" name="Shape 12"/>
+          <p:cNvSpPr/>
+          <p:nvPr/>
+        </p:nvSpPr>
+        <p:spPr>
+          <a:xfrm>
+            <a:off x="8708212" y="91440"/>
+            <a:ext cx="73152" cy="274320"/>
+          </a:xfrm>
+          <a:prstGeom prst="rect">
+            <a:avLst/>
+          </a:prstGeom>
+          <a:solidFill>
+            <a:srgbClr val="0369A1"/>
+          </a:solidFill>
+          <a:ln w="12700">
+            <a:solidFill>
+              <a:srgbClr val="0369A1"/>
+            </a:solidFill>
+            <a:prstDash val="solid"/>
+          </a:ln>
+        </p:spPr>
+      </p:sp>
+      <p:pic>
+        <p:nvPicPr>
+          <p:cNvPr id="16" name="Image 0" descr="preencoded.png">    </p:cNvPr>
+          <p:cNvPicPr>
+            <a:picLocks noChangeAspect="1"/>
+          </p:cNvPicPr>
+          <p:nvPr/>
+        </p:nvPicPr>
+        <p:blipFill>
+          <a:blip r:embed="rId1"/>
+          <a:stretch>
+            <a:fillRect/>
+          </a:stretch>
+        </p:blipFill>
+        <p:spPr>
+          <a:xfrm>
+            <a:off x="8836228" y="128016"/>
+            <a:ext cx="201168" cy="201168"/>
+          </a:xfrm>
+          <a:prstGeom prst="rect">
+            <a:avLst/>
+          </a:prstGeom>
+        </p:spPr>
+      </p:pic>
+      <p:sp>
+        <p:nvSpPr>
+          <p:cNvPr id="17" name="Text 13"/>
+          <p:cNvSpPr txBox="1"/>
+          <p:nvPr/>
+        </p:nvSpPr>
+        <p:spPr>
+          <a:xfrm>
+            <a:off x="9092260" y="91440"/>
+            <a:ext cx="2514219" cy="274320"/>
+          </a:xfrm>
+          <a:prstGeom prst="rect">
+            <a:avLst/>
+          </a:prstGeom>
+          <a:noFill/>
+          <a:ln/>
+        </p:spPr>
+        <p:txBody>
+          <a:bodyPr wrap="square" lIns="0" tIns="0" rIns="0" bIns="0" rtlCol="0" anchor="ctr"/>
+          <a:lstStyle/>
+          <a:p>
+            <a:pPr indent="0" marL="0">
+              <a:buNone/>
+            </a:pPr>
+            <a:r>
+              <a:rPr lang="en-US" sz="1100" b="1" dirty="0">
+                <a:solidFill>
+                  <a:srgbClr val="075985"/>
+                </a:solidFill>
+                <a:latin typeface="Calibri" pitchFamily="34" charset="0"/>
+                <a:ea typeface="Calibri" pitchFamily="34" charset="-122"/>
+                <a:cs typeface="Calibri" pitchFamily="34" charset="-120"/>
+              </a:rPr>
+              <a:t>DA COMPRENDERE OGGI</a:t>
+            </a:r>
+            <a:pPr indent="0" marL="0">
+              <a:buNone/>
+            </a:pPr>
+            <a:r>
+              <a:rPr lang="en-US" sz="1100" dirty="0">
+                <a:solidFill>
+                  <a:srgbClr val="075985"/>
+                </a:solidFill>
+                <a:latin typeface="Calibri" pitchFamily="34" charset="0"/>
+                <a:ea typeface="Calibri" pitchFamily="34" charset="-122"/>
+                <a:cs typeface="Calibri" pitchFamily="34" charset="-120"/>
+              </a:rPr>
+              <a:t> · i codici</a:t>
+            </a:r>
+            <a:endParaRPr lang="en-US" sz="1100" dirty="0"/>
+          </a:p>
+        </p:txBody>
+      </p:sp>
+      <p:sp>
+        <p:nvSpPr>
           <p:cNvPr id="25" name="Slide Number Placeholder 0"/>
           <p:cNvSpPr>
             <a:spLocks noGrp="1"/>
@@ -28190,6 +30336,133 @@
               <a:t>uno su quattro: è attiva la terza linea, quindi è scelto il terzo elemento</a:t>
             </a:r>
             <a:endParaRPr lang="en-US" sz="1900" dirty="0"/>
+          </a:p>
+        </p:txBody>
+      </p:sp>
+      <p:sp>
+        <p:nvSpPr>
+          <p:cNvPr id="14" name="Shape 12"/>
+          <p:cNvSpPr/>
+          <p:nvPr/>
+        </p:nvSpPr>
+        <p:spPr>
+          <a:xfrm>
+            <a:off x="8051622" y="91440"/>
+            <a:ext cx="3591433" cy="274320"/>
+          </a:xfrm>
+          <a:prstGeom prst="rect">
+            <a:avLst/>
+          </a:prstGeom>
+          <a:solidFill>
+            <a:srgbClr val="E0F2FE"/>
+          </a:solidFill>
+          <a:ln w="12700">
+            <a:solidFill>
+              <a:srgbClr val="0369A1"/>
+            </a:solidFill>
+            <a:prstDash val="solid"/>
+          </a:ln>
+        </p:spPr>
+      </p:sp>
+      <p:sp>
+        <p:nvSpPr>
+          <p:cNvPr id="15" name="Shape 13"/>
+          <p:cNvSpPr/>
+          <p:nvPr/>
+        </p:nvSpPr>
+        <p:spPr>
+          <a:xfrm>
+            <a:off x="8051622" y="91440"/>
+            <a:ext cx="73152" cy="274320"/>
+          </a:xfrm>
+          <a:prstGeom prst="rect">
+            <a:avLst/>
+          </a:prstGeom>
+          <a:solidFill>
+            <a:srgbClr val="0369A1"/>
+          </a:solidFill>
+          <a:ln w="12700">
+            <a:solidFill>
+              <a:srgbClr val="0369A1"/>
+            </a:solidFill>
+            <a:prstDash val="solid"/>
+          </a:ln>
+        </p:spPr>
+      </p:sp>
+      <p:pic>
+        <p:nvPicPr>
+          <p:cNvPr id="16" name="Image 0" descr="preencoded.png">    </p:cNvPr>
+          <p:cNvPicPr>
+            <a:picLocks noChangeAspect="1"/>
+          </p:cNvPicPr>
+          <p:nvPr/>
+        </p:nvPicPr>
+        <p:blipFill>
+          <a:blip r:embed="rId1"/>
+          <a:stretch>
+            <a:fillRect/>
+          </a:stretch>
+        </p:blipFill>
+        <p:spPr>
+          <a:xfrm>
+            <a:off x="8179638" y="128016"/>
+            <a:ext cx="201168" cy="201168"/>
+          </a:xfrm>
+          <a:prstGeom prst="rect">
+            <a:avLst/>
+          </a:prstGeom>
+        </p:spPr>
+      </p:pic>
+      <p:sp>
+        <p:nvSpPr>
+          <p:cNvPr id="17" name="Text 14"/>
+          <p:cNvSpPr txBox="1"/>
+          <p:nvPr/>
+        </p:nvSpPr>
+        <p:spPr>
+          <a:xfrm>
+            <a:off x="8435670" y="91440"/>
+            <a:ext cx="3170809" cy="274320"/>
+          </a:xfrm>
+          <a:prstGeom prst="rect">
+            <a:avLst/>
+          </a:prstGeom>
+          <a:noFill/>
+          <a:ln/>
+        </p:spPr>
+        <p:txBody>
+          <a:bodyPr wrap="square" lIns="0" tIns="0" rIns="0" bIns="0" rtlCol="0" anchor="ctr"/>
+          <a:lstStyle/>
+          <a:p>
+            <a:pPr indent="0" marL="0">
+              <a:buNone/>
+            </a:pPr>
+            <a:r>
+              <a:rPr lang="en-US" sz="1100" b="1" dirty="0">
+                <a:solidFill>
+                  <a:srgbClr val="075985"/>
+                </a:solidFill>
+                <a:latin typeface="Calibri" pitchFamily="34" charset="0"/>
+                <a:ea typeface="Calibri" pitchFamily="34" charset="-122"/>
+                <a:cs typeface="Calibri" pitchFamily="34" charset="-120"/>
+              </a:rPr>
+              <a:t>DA COMPRENDERE OGGI</a:t>
+            </a:r>
+            <a:pPr indent="0" marL="0">
+              <a:buNone/>
+            </a:pPr>
+            <a:r>
+              <a:rPr lang="en-US" sz="1100" dirty="0">
+                <a:solidFill>
+                  <a:srgbClr val="075985"/>
+                </a:solidFill>
+                <a:latin typeface="Calibri" pitchFamily="34" charset="0"/>
+                <a:ea typeface="Calibri" pitchFamily="34" charset="-122"/>
+                <a:cs typeface="Calibri" pitchFamily="34" charset="-120"/>
+              </a:rPr>
+              <a:t> · decoder ed encoder</a:t>
+            </a:r>
+            <a:endParaRPr lang="en-US" sz="1100" dirty="0"/>
           </a:p>
         </p:txBody>
       </p:sp>
@@ -30709,9 +32982,59 @@
           </a:ln>
         </p:spPr>
       </p:sp>
+      <p:sp>
+        <p:nvSpPr>
+          <p:cNvPr id="12" name="Shape 9"/>
+          <p:cNvSpPr/>
+          <p:nvPr/>
+        </p:nvSpPr>
+        <p:spPr>
+          <a:xfrm>
+            <a:off x="8051622" y="91440"/>
+            <a:ext cx="3591433" cy="274320"/>
+          </a:xfrm>
+          <a:prstGeom prst="rect">
+            <a:avLst/>
+          </a:prstGeom>
+          <a:solidFill>
+            <a:srgbClr val="E0F2FE"/>
+          </a:solidFill>
+          <a:ln w="12700">
+            <a:solidFill>
+              <a:srgbClr val="0369A1"/>
+            </a:solidFill>
+            <a:prstDash val="solid"/>
+          </a:ln>
+        </p:spPr>
+      </p:sp>
+      <p:sp>
+        <p:nvSpPr>
+          <p:cNvPr id="13" name="Shape 10"/>
+          <p:cNvSpPr/>
+          <p:nvPr/>
+        </p:nvSpPr>
+        <p:spPr>
+          <a:xfrm>
+            <a:off x="8051622" y="91440"/>
+            <a:ext cx="73152" cy="274320"/>
+          </a:xfrm>
+          <a:prstGeom prst="rect">
+            <a:avLst/>
+          </a:prstGeom>
+          <a:solidFill>
+            <a:srgbClr val="0369A1"/>
+          </a:solidFill>
+          <a:ln w="12700">
+            <a:solidFill>
+              <a:srgbClr val="0369A1"/>
+            </a:solidFill>
+            <a:prstDash val="solid"/>
+          </a:ln>
+        </p:spPr>
+      </p:sp>
       <p:pic>
         <p:nvPicPr>
-          <p:cNvPr id="13" name="Image 0" descr="preencoded.png">    </p:cNvPr>
+          <p:cNvPr id="14" name="Image 0" descr="preencoded.png">    </p:cNvPr>
           <p:cNvPicPr>
             <a:picLocks noChangeAspect="1"/>
           </p:cNvPicPr>
@@ -30719,6 +33042,83 @@
         </p:nvPicPr>
         <p:blipFill>
           <a:blip r:embed="rId1"/>
+          <a:stretch>
+            <a:fillRect/>
+          </a:stretch>
+        </p:blipFill>
+        <p:spPr>
+          <a:xfrm>
+            <a:off x="8179638" y="128016"/>
+            <a:ext cx="201168" cy="201168"/>
+          </a:xfrm>
+          <a:prstGeom prst="rect">
+            <a:avLst/>
+          </a:prstGeom>
+        </p:spPr>
+      </p:pic>
+      <p:sp>
+        <p:nvSpPr>
+          <p:cNvPr id="15" name="Text 11"/>
+          <p:cNvSpPr txBox="1"/>
+          <p:nvPr/>
+        </p:nvSpPr>
+        <p:spPr>
+          <a:xfrm>
+            <a:off x="8435670" y="91440"/>
+            <a:ext cx="3170809" cy="274320"/>
+          </a:xfrm>
+          <a:prstGeom prst="rect">
+            <a:avLst/>
+          </a:prstGeom>
+          <a:noFill/>
+          <a:ln/>
+        </p:spPr>
+        <p:txBody>
+          <a:bodyPr wrap="square" lIns="0" tIns="0" rIns="0" bIns="0" rtlCol="0" anchor="ctr"/>
+          <a:lstStyle/>
+          <a:p>
+            <a:pPr indent="0" marL="0">
+              <a:buNone/>
+            </a:pPr>
+            <a:r>
+              <a:rPr lang="en-US" sz="1100" b="1" dirty="0">
+                <a:solidFill>
+                  <a:srgbClr val="075985"/>
+                </a:solidFill>
+                <a:latin typeface="Calibri" pitchFamily="34" charset="0"/>
+                <a:ea typeface="Calibri" pitchFamily="34" charset="-122"/>
+                <a:cs typeface="Calibri" pitchFamily="34" charset="-120"/>
+              </a:rPr>
+              <a:t>DA COMPRENDERE OGGI</a:t>
+            </a:r>
+            <a:pPr indent="0" marL="0">
+              <a:buNone/>
+            </a:pPr>
+            <a:r>
+              <a:rPr lang="en-US" sz="1100" dirty="0">
+                <a:solidFill>
+                  <a:srgbClr val="075985"/>
+                </a:solidFill>
+                <a:latin typeface="Calibri" pitchFamily="34" charset="0"/>
+                <a:ea typeface="Calibri" pitchFamily="34" charset="-122"/>
+                <a:cs typeface="Calibri" pitchFamily="34" charset="-120"/>
+              </a:rPr>
+              <a:t> · decoder ed encoder</a:t>
+            </a:r>
+            <a:endParaRPr lang="en-US" sz="1100" dirty="0"/>
+          </a:p>
+        </p:txBody>
+      </p:sp>
+      <p:pic>
+        <p:nvPicPr>
+          <p:cNvPr id="17" name="Image 1" descr="preencoded.png">    </p:cNvPr>
+          <p:cNvPicPr>
+            <a:picLocks noChangeAspect="1"/>
+          </p:cNvPicPr>
+          <p:nvPr/>
+        </p:nvPicPr>
+        <p:blipFill>
+          <a:blip r:embed="rId2"/>
           <a:stretch>
             <a:fillRect/>
           </a:stretch>

--- a/it/slides/11-Architettura_dei_Calcolatori-Macchine_Combinatorie.pptx
+++ b/it/slides/11-Architettura_dei_Calcolatori-Macchine_Combinatorie.pptx
@@ -126,26 +126,26 @@
   <p:extLst>
     <p:ext uri="{521415D9-36F7-43E2-AB2F-B90AF26B5E84}">
       <p14:sectionLst xmlns:p14="http://schemas.microsoft.com/office/powerpoint/2010/main">
-        <p14:section name="Apertura" id="{b71e7298-ae65-efa7-8c0b-bd153e2ba094}">
+        <p14:section name="Apertura" id="{98a2734f-0f33-67ee-dcd9-e74a223844dd}">
           <p14:sldIdLst>
             <p14:sldId id="256"/>
             <p14:sldId id="257"/>
           </p14:sldIdLst>
         </p14:section>
-        <p14:section name="Macchine combinatorie" id="{a687366e-9029-bed0-37df-801a99bce457}">
+        <p14:section name="Macchine combinatorie" id="{4a66b21f-9e64-6aad-cf75-60bd309e830f}">
           <p14:sldIdLst>
             <p14:sldId id="258"/>
             <p14:sldId id="259"/>
           </p14:sldIdLst>
         </p14:section>
-        <p14:section name="Codici" id="{af204aa1-7563-2d12-2c01-e66e1d665662}">
+        <p14:section name="Codici" id="{f73a9dbd-400d-130d-528a-af0acdc5217a}">
           <p14:sldIdLst>
             <p14:sldId id="260"/>
             <p14:sldId id="261"/>
             <p14:sldId id="262"/>
           </p14:sldIdLst>
         </p14:section>
-        <p14:section name="Decodificatori e codificatori" id="{fa351618-2343-02b0-2be3-686d5bff8d75}">
+        <p14:section name="Decodificatori e codificatori" id="{f8072b7d-8925-76de-1279-4b2f222d4cb9}">
           <p14:sldIdLst>
             <p14:sldId id="263"/>
             <p14:sldId id="264"/>
@@ -153,19 +153,19 @@
             <p14:sldId id="266"/>
           </p14:sldIdLst>
         </p14:section>
-        <p14:section name="Multiplexer e demultiplexer" id="{fd8ae33f-6c8b-4576-a6c7-add6fe40f5a2}">
+        <p14:section name="Multiplexer e demultiplexer" id="{a64f1e22-194e-90a4-45f5-18d5735ec6c1}">
           <p14:sldIdLst>
             <p14:sldId id="267"/>
             <p14:sldId id="268"/>
           </p14:sldIdLst>
         </p14:section>
-        <p14:section name="Confrontare e controllare" id="{1d26014d-a93f-6437-17be-5082deea643d}">
+        <p14:section name="Confrontare e controllare" id="{5739f38c-9c0a-4dc7-452f-74a379684183}">
           <p14:sldIdLst>
             <p14:sldId id="269"/>
             <p14:sldId id="270"/>
           </p14:sldIdLst>
         </p14:section>
-        <p14:section name="L'unità aritmetico-logica" id="{75c7edda-23ef-8a51-0443-3422218ec9b5}">
+        <p14:section name="L'unità aritmetico-logica" id="{57f7d76a-e4e4-e371-c76c-89ff28e7417a}">
           <p14:sldIdLst>
             <p14:sldId id="271"/>
             <p14:sldId id="272"/>

--- a/it/slides/11-Architettura_dei_Calcolatori-Macchine_Combinatorie.pptx
+++ b/it/slides/11-Architettura_dei_Calcolatori-Macchine_Combinatorie.pptx
@@ -126,26 +126,26 @@
   <p:extLst>
     <p:ext uri="{521415D9-36F7-43E2-AB2F-B90AF26B5E84}">
       <p14:sectionLst xmlns:p14="http://schemas.microsoft.com/office/powerpoint/2010/main">
-        <p14:section name="Apertura" id="{98a2734f-0f33-67ee-dcd9-e74a223844dd}">
+        <p14:section name="Apertura" id="{57e5ecfe-13e3-f5a9-40f1-37093b84a767}">
           <p14:sldIdLst>
             <p14:sldId id="256"/>
             <p14:sldId id="257"/>
           </p14:sldIdLst>
         </p14:section>
-        <p14:section name="Macchine combinatorie" id="{4a66b21f-9e64-6aad-cf75-60bd309e830f}">
+        <p14:section name="Macchine combinatorie" id="{0d55698b-eeb4-c2f0-b0e8-f44cc7262a1a}">
           <p14:sldIdLst>
             <p14:sldId id="258"/>
             <p14:sldId id="259"/>
           </p14:sldIdLst>
         </p14:section>
-        <p14:section name="Codici" id="{f73a9dbd-400d-130d-528a-af0acdc5217a}">
+        <p14:section name="Codici" id="{c093971d-c80c-b0c9-ee7f-0dac767d49f0}">
           <p14:sldIdLst>
             <p14:sldId id="260"/>
             <p14:sldId id="261"/>
             <p14:sldId id="262"/>
           </p14:sldIdLst>
         </p14:section>
-        <p14:section name="Decodificatori e codificatori" id="{f8072b7d-8925-76de-1279-4b2f222d4cb9}">
+        <p14:section name="Decodificatori e codificatori" id="{04454fe1-2945-d76b-c163-546a4d75aec1}">
           <p14:sldIdLst>
             <p14:sldId id="263"/>
             <p14:sldId id="264"/>
@@ -153,19 +153,19 @@
             <p14:sldId id="266"/>
           </p14:sldIdLst>
         </p14:section>
-        <p14:section name="Multiplexer e demultiplexer" id="{a64f1e22-194e-90a4-45f5-18d5735ec6c1}">
+        <p14:section name="Multiplexer e demultiplexer" id="{1085edec-10d3-4da0-a361-6a13012d5b79}">
           <p14:sldIdLst>
             <p14:sldId id="267"/>
             <p14:sldId id="268"/>
           </p14:sldIdLst>
         </p14:section>
-        <p14:section name="Confrontare e controllare" id="{5739f38c-9c0a-4dc7-452f-74a379684183}">
+        <p14:section name="Confrontare e controllare" id="{50d0e1de-fe6f-e09c-c4cf-5f5e63a1bb4e}">
           <p14:sldIdLst>
             <p14:sldId id="269"/>
             <p14:sldId id="270"/>
           </p14:sldIdLst>
         </p14:section>
-        <p14:section name="L'unità aritmetico-logica" id="{57f7d76a-e4e4-e371-c76c-89ff28e7417a}">
+        <p14:section name="L'unità aritmetico-logica" id="{a7e28e75-14e8-fb1e-3eb8-7ebf29195c6d}">
           <p14:sldIdLst>
             <p14:sldId id="271"/>
             <p14:sldId id="272"/>
@@ -578,7 +578,7 @@
           <a:p>
             <a:r>
               <a:rPr lang="en-US" dirty="0"/>
-              <a:t>Le lezioni precedenti vi hanno dato le porte e un metodo per combinarle. Questa è un catalogo delle macchine che i progettisti usano davvero: decodificatori, codificatori, multiplexer, comparatori, reti di parità, e infine l'unità aritmetico-logica. Per ciascuna imparate che cosa fa, come è costruita, e dove sta dentro un processore RISC-V. Il giovane Turing della citazione vuole carote e piselli ben separati: questa lezione parla di tenere le cose distinte, e di scegliere tra esse.
+              <a:t>Le lezioni precedenti hanno fornito le porte e un metodo per combinarle. Questa è un catalogo delle macchine combinatorie standard con cui i progettisti costruiscono davvero i sistemi: decoder, encoder, multiplexer, comparatori, reti di parità, e infine l'unità aritmetico-logica. Per ciascuna la lezione stabilisce che cosa calcola, come si costruisce e dove si trova dentro un processore RISC-V. Il giovane Turing della citazione pretende che carote e piselli restino separati; anche questa lezione parla di tenere distinti i segnali e di scegliere tra di essi.
 Stato di apprendimento: DA COMPRENDERE OGGI, alla fine di questa lezione lo spiegate, lo seguite passo passo e lo applicate da soli; DA UTILIZZARE OGGI, oggi seguite e usate la ricetta; come funziona dentro si spiega più avanti, o non fa parte del corso; DA COMPRENDERE PIÙ AVANTI, riconoscete il nome e lo scopo; lo spiega una lezione successiva. Una slide senza etichetta è contesto: una storia, un esempio, una domanda, un esercizio.
 Stato di apprendimento di questa lezione. DA COMPRENDERE OGGI: i multiplexer; le reti combinatorie; i codici; decoder ed encoder; comparatori e parità; l'ALU. DA UTILIZZARE OGGI: il programma completo, gli strumenti di PRG32 (si usa, non si studia, in questo corso). DA COMPRENDERE PIÙ AVANTI: macchine a stati finiti (Lezione 13). Una slide senza etichetta è contesto: una storia, un esempio, una domanda, un esercizio.
 Per il docente: Spirale: una ricerca in tabella in assembly è un multiplexer; la lezione costruisce poi i blocchi combinatori standard e mostra dove sta ciascuno dentro un processore RISC-V (il corso degli anni precedenti usava come riferimento il Motorola 68000).</a:t>
@@ -669,7 +669,7 @@
           <a:p>
             <a:r>
               <a:rPr lang="en-US" dirty="0"/>
-              <a:t>Il codificatore è la macchina inversa: riceve N linee, di cui una attiva, e ne produce il numero come parola codice di m bit. Ogni bit di uscita è l'OR delle linee di ingresso il cui numero ha un 1 in quella posizione. Se più linee possono essere attive insieme serve un codificatore con priorità, che dà in uscita il numero della linea attiva più importante. Lo ritroverete con le interruzioni, quando più dispositivi chiedono attenzione nello stesso momento.
+              <a:t>L'encoder è la macchina inversa: riceve N linee, di cui una attiva, e produce l'indice della linea attiva come parola di codice di m bit. Ogni bit di uscita è l'OR delle linee di ingresso il cui indice ha 1 in quella posizione. Se più linee possono essere attive contemporaneamente serve un encoder a priorità, che produce l'indice della linea attiva più importante. Il problema che risolve, scegliere tra richieste simultanee, ricompare nella Lezione 19, dove le interruzioni sono ordinate per priorità.
 DA COMPRENDERE OGGI: decoder ed encoder.
 Per il docente: Per N = 4: C0 = U1 + U3, C1 = U2 + U3. I codificatori con priorità ricompaiono con le interruzioni: più dispositivi chiedono attenzione, un solo numero arriva al processore.</a:t>
             </a:r>
@@ -759,7 +759,7 @@
           <a:p>
             <a:r>
               <a:rPr lang="en-US" dirty="0"/>
-              <a:t>Un transcodificatore converte una parola di un codice nella parola corrispondente di un altro codice. L'esempio è il display a sette segmenti: l'ingresso è una cifra BCD, le uscite sono le sette linee che accendono i segmenti, chiamati da a a g. La tabella dà, per ogni cifra, i segmenti accesi: la cifra 2 accende a, b, g, e e d. Le uscite sono sette, quindi ci sono sette funzioni di quattro variabili da sintetizzare, ciascuna con sei indifferenze.
+              <a:t>Un transcodificatore converte una parola di un codice nella parola corrispondente di un altro. L'esempio è il display a sette segmenti: l'ingresso è una cifra BCD, e le uscite sono le sette linee, da a a g, che accendono i segmenti. La tabella dà, per ogni cifra, i segmenti accesi: la cifra 2 accende a, b, g, e e d. Ci sono sette uscite, quindi sette funzioni di quattro variabili da sintetizzare, ciascuna con sei condizioni di indifferenza che le mappe di Karnaugh della Lezione 09 possono sfruttare.
 DA COMPRENDERE OGGI: decoder ed encoder.
 Per il docente: Transcodificatore BCD - display a 7 segmenti. Ogni segmento è un LED comandato da un segnale digitale. Le sei parole BCD non usate sono indifferenze per tutte e sette le funzioni.</a:t>
             </a:r>
@@ -849,7 +849,7 @@
           <a:p>
             <a:r>
               <a:rPr lang="en-US" dirty="0"/>
-              <a:t>Un multiplexer ha 2 alla n ingressi dati, n linee di selezione e un'uscita: trasferisce sull'uscita l'ingresso scelto dalle linee di selezione. La formula mostra come: ogni ingresso dati è moltiplicato per un mintermine delle linee di selezione, e i prodotti si sommano. Con due ingressi, Y = S'I0 + S I1: quando S vale 0 il primo termine lascia passare I0, quando S vale 1 il secondo lascia passare I1. Il disegno è esattamente questa formula in porte. È la macchina del riscaldamento.
+              <a:t>Un multiplexer ha 2^n ingressi di dato, n linee di selezione e un'uscita: instrada verso l'uscita l'ingresso designato dalle linee di selezione. La formula mostra come: ogni ingresso di dato è moltiplicato per un mintermine delle linee di selezione, e i prodotti si sommano. Con due ingressi, Y = S'I0 + S I1: quando S vale 0 il primo termine lascia passare I0, quando S vale 1 il secondo lascia passare I1. Il disegno realizza direttamente questa formula in porte. È la macchina che il riscaldamento ha realizzato in software.
 DA COMPRENDERE OGGI: i multiplexer.
 Per il docente: Multiplexer indirizzabile: un MUXL (una linea di abilitazione per ingresso) più un decodificatore. Un multiplexer realizza anche qualunque funzione delle sue variabili di selezione: si mette la tabella di verità sugli ingressi dati.</a:t>
             </a:r>
@@ -939,7 +939,7 @@
           <a:p>
             <a:r>
               <a:rPr lang="en-US" dirty="0"/>
-              <a:t>Il demultiplexer è l'inverso: un ingresso dati, n linee di selezione e 2 alla n uscite. L'ingresso è instradato sull'uscita scelta dalle linee di selezione, e le altre uscite restano a 0. Con l'ingresso dati fisso a 1 è esattamente un decodificatore. Un multiplexer a un capo di un filo e un demultiplexer all'altro permettono a molti segnali di condividere quel filo, uno alla volta: è l'idea che sta dietro ogni linea condivisa, compresi i bus della Lezione 14.
+              <a:t>Il demultiplexer è l'inverso: un ingresso di dato, n linee di selezione e 2^n uscite. L'ingresso viene instradato all'uscita designata dalle linee di selezione, mentre le altre uscite restano a 0. Con l'ingresso di dato fisso a 1, un demultiplexer è esattamente un decoder. Un multiplexer a un capo di un filo e un demultiplexer all'altro permettono a molti segnali di condividere quel filo, uno alla volta: il principio alla base di ogni linea condivisa, compresi i bus della Lezione 14.
 DA COMPRENDERE OGGI: i multiplexer.
 Per il docente: Demultiplexer indirizzabile: Fi = D . Ui, dove Ui sono le uscite del decodificatore.</a:t>
             </a:r>
@@ -1029,7 +1029,7 @@
           <a:p>
             <a:r>
               <a:rPr lang="en-US" dirty="0"/>
-              <a:t>Un comparatore riceve due parole e produce un bit, che vale 1 quando sono uguali. Due bit sono uguali quando il loro XNOR vale 1; due parole sono uguali quando lo sono tutte le loro coppie di bit, quindi il comparatore è un AND di XNOR. Il disegno lo mostra per parole di due bit. Nel processore decide i salti beq e bne: i due registri vengono confrontati, e il salto avviene o no secondo il risultato.
+              <a:t>Un comparatore riceve due parole e produce un solo bit, 1 quando sono uguali. Due bit sono uguali quando il loro XNOR vale 1; due parole sono uguali quando tutte le coppie di bit corrispondenti sono uguali, quindi il comparatore è un AND di XNOR. Il disegno mostra il caso a due bit. Nel processore il comparatore decide i salti beq e bne: i due registri vengono confrontati, e il salto si esegue o no a seconda del risultato.
 DA COMPRENDERE OGGI: comparatori e parità.
 Per il docente: Molti datapath riusano invece la ALU: sottraggono e verificano se il risultato è zero. I confronti d'ordine (blt, slt) richiedono la sottrazione e le regole di segno della Lezione 05.</a:t>
             </a:r>
@@ -1119,7 +1119,7 @@
           <a:p>
             <a:r>
               <a:rPr lang="en-US" dirty="0"/>
-              <a:t>Il codice ridondante più semplice aggiunge a ogni parola un bit di parità, scelto in modo che il numero totale di 1 sia, per esempio, pari. Il circuito che lo calcola è una rete di parità, una catena di XOR: lo XOR di tutti i bit di una parola vale 1 quando il numero di 1 è dispari, perché XOR è la somma modulo 2. La rete si usa due volte: da chi trasmette, per calcolare il bit da aggiungere, e da chi riceve, per verificare la parità di ciò che è arrivato.
+              <a:t>Il codice ridondante più semplice aggiunge a ogni parola un bit di parità, scelto così che il numero totale di 1 sia, per esempio, pari. Il circuito che lo calcola è una rete di parità, un albero di porte XOR: lo XOR di tutti i bit di una parola vale 1 quando il numero di 1 è dispari, perché lo XOR è la somma modulo 2. La stessa rete si usa due volte: dal mittente, per calcolare il bit da aggiungere, e dal destinatario, per verificare la parità di ciò che è arrivato.
 DA COMPRENDERE OGGI: comparatori e parità.
 Per il docente: In inglese: parity network. XOR è la somma modulo 2, ed è per questo che una catena di XOR conta gli 1 modulo 2.</a:t>
             </a:r>
@@ -1209,7 +1209,7 @@
           <a:p>
             <a:r>
               <a:rPr lang="en-US" dirty="0"/>
-              <a:t>La ALU riceve due parole, A e B. Al suo interno più unità lavorano insieme sugli stessi operandi: un addizionatore che fa anche le sottrazioni, una fila di porte AND, una di porte OR, una di porte XOR, uno shifter. Tutte producono un risultato. Un multiplexer lascia passare uno dei risultati, e le sue linee di selezione vengono da un decodificatore che legge l'istruzione. Non c'è memoria da nessuna parte: la ALU è un'unica grande macchina combinatoria, e il suo percorso più lento, la catena dei riporti dell'addizionatore, limita il clock del processore.
+              <a:t>La ALU riceve due parole, A e B. Al suo interno più unità operano contemporaneamente sugli stessi operandi: un sommatore che sottrae anche, una fila di porte AND, una fila di porte OR, una fila di porte XOR, un circuito di scorrimento. Ciascuna produce un risultato, e un multiplexer ne passa uno all'uscita, con le linee di selezione pilotate da un decoder che legge l'istruzione. Non c'è memoria da nessuna parte: la ALU è una grande macchina combinatoria, e il suo cammino più lento, la catena dei riporti del sommatore, limita la frequenza di clock del processore. Il catalogo della lezione converge così nel cuore del percorso dei dati.
 DA COMPRENDERE OGGI: l'ALU.
 Per il docente: In inglese: arithmetic logic unit. L'addizionatore è il sommatore a propagazione del riporto della Lezione 09, con il trucco del complemento e del riporto della Lezione 05 per la sottrazione. I confronti (slt) riusano il sottrattore.</a:t>
             </a:r>
@@ -1299,8 +1299,8 @@
           <a:p>
             <a:r>
               <a:rPr lang="en-US" dirty="0"/>
-              <a:t>Usate la formula del codice a lunghezza fissa: il più piccolo m tale che 2 alla m sia almeno 26. Quattro bit danno sedici parole, che non bastano. E notate che il risultato lascia alcune parole inutilizzate.
-Un decodificatore con m ingressi ha 2 alla m uscite, e la sua uscita è una rappresentazione decodificata: in ogni istante è attiva esattamente una linea.
+              <a:t>Per la prima domanda vale la formula della lunghezza fissa: il più piccolo m tale che 2^m sia almeno 26. Quattro bit danno sedici parole, che non bastano; il risultato lascia anche alcune parole inutilizzate, rendendo il codice incompleto.
+Per la seconda, un decoder con m ingressi ha 2^m uscite, e la sua uscita è in rappresentazione decodificata: è attiva esattamente una linea alla volta.
 Per il docente: 1. Risposta: B. ceil(log2 26) = 5, perché 2^4 = 16 &lt; 26 &lt;= 32 = 2^5. Restano sei parole non assegnate: il codice è incompleto.
 2. Risposta: C. 2^3 = 8 uscite, e ne è attiva esattamente una: la rappresentazione decodificata (one-hot) della parola in ingresso.</a:t>
             </a:r>
@@ -1390,8 +1390,8 @@
           <a:p>
             <a:r>
               <a:rPr lang="en-US" dirty="0"/>
-              <a:t>La relazione è l'inversa della precedente: n linee di selezione scelgono tra 2 alla n ingressi. Otto è 2 alla terza.
-Contate gli 1. Un controllo di parità sa soltanto se il loro numero è pari o dispari. Alterare un bit cambia questo fatto; alterarne due lo cambia due volte, e lo riporta dov'era.
+              <a:t>Per la prima domanda la relazione è l'inversa della precedente: n linee di selezione scelgono tra 2^n ingressi, e otto è 2^3.
+Per la seconda si contano gli 1. Un controllo di parità sa solo se il loro numero è pari o dispari. Alterare un bit cambia la parità; alterarne due la cambia due volte, ripristinandola. Il controllo rileva quindi ogni errore su un singolo bit e nessun errore su due bit.
 Per il docente: 1. Risposta: B. n linee di selezione scelgono tra 2^n ingressi: 3 linee per 8 ingressi.
 2. Risposta: C. Due alterazioni lasciano invariata la parità. Un solo bit di parità rileva soltanto un numero dispari di errori.</a:t>
             </a:r>
@@ -1481,7 +1481,7 @@
           <a:p>
             <a:r>
               <a:rPr lang="en-US" dirty="0"/>
-              <a:t>Dodici termini. Enable, abilitazione, è l'ingresso che accende o spegne un blocco. Code word, parola codice, è ciascuna stringa di un codice. Multiplexer e demultiplexer conservano il nome anche in italiano. Un transcoder, transcodificatore, converte tra due codici. Il parity bit, bit di parità, è il bit ridondante aggiunto per il controllo.</a:t>
+              <a:t>Dodici termini. L'enable è l'ingresso che attiva o disattiva un blocco. Una parola di codice è ogni stringa di un codice. Multiplexer e demultiplexer conservano il loro nome in italiano. Un transcodificatore converte tra due codici. Il bit di parità è il bit ridondante aggiunto per il controllo.</a:t>
             </a:r>
             <a:endParaRPr lang="en-US" dirty="0"/>
           </a:p>
@@ -1569,7 +1569,7 @@
           <a:p>
             <a:r>
               <a:rPr lang="en-US" dirty="0"/>
-              <a:t>Sei obiettivi. Distinguere una macchina combinatoria da una sequenziale. Calcolare quanti bit richiede un codice e riconoscere codici incompleti e ridondanti. Progettare un decodificatore e un codificatore, e dire che cosa fa un transcodificatore. Spiegare multiplexer e demultiplexer e costruirli con le porte. Costruire un comparatore e una rete di parità, sapendo che cosa un controllo di parità può e non può rilevare. E indicare ciascuna di queste macchine dentro il processore.</a:t>
+              <a:t>Sei risultati di apprendimento. Distinguere una macchina combinatoria da una sequenziale. Calcolare il numero di bit che un codice richiede, e riconoscere codici incompleti e ridondanti. Progettare un decoder e un encoder, e spiegare che cosa fa un transcodificatore. Spiegare multiplexer e demultiplexer e costruirli con le porte. Costruire un comparatore e una rete di parità, con chiaro che cosa un controllo di parità può e non può rilevare. E collocare ciascuna di queste macchine dentro il processore.</a:t>
             </a:r>
             <a:endParaRPr lang="en-US" dirty="0"/>
           </a:p>
@@ -1657,7 +1657,7 @@
           <a:p>
             <a:r>
               <a:rPr lang="en-US" dirty="0"/>
-              <a:t>Cinque conclusioni. Un codice scrive ogni elemento di un insieme come stringa di simboli su un alfabeto, la sua parola codice. Un codice binario a lunghezza fissa richiede il logaritmo di N bit, arrotondato per eccesso; un codice ridondante ne spende di più per rilevare gli errori. Codifica, decodifica e transcodifica sono svolte da macchine combinatorie. I multiplexer selezionano una sorgente, i demultiplexer una destinazione, comparatori e reti di parità controllano. E il processore li usa tutti. A queste macchine manca la memoria: dopo la Parte 2 di Verm1, la aggiunge la Lezione 13.
+              <a:t>Cinque conclusioni. Un codice scrive ogni elemento di un insieme come stringa di simboli, la sua parola di codice. Un codice binario a lunghezza fissa richiede log2 N bit arrotondato per eccesso, e un codice ridondante spende bit in più per rilevare errori. Codifica, decodifica e transcodifica sono svolte da macchine combinatorie. I multiplexer scelgono una sorgente, i demultiplexer una destinazione, mentre comparatori e reti di parità verificano. Il processore le impiega tutte. A queste macchine manca la memoria: dopo la Parte 2 di Verm1, la Lezione 13 la fornisce.
 Stato di apprendimento, riepilogo. DA COMPRENDERE OGGI: i multiplexer; le reti combinatorie; i codici; decoder ed encoder; comparatori e parità; l'ALU. DA UTILIZZARE OGGI: il programma completo, gli strumenti di PRG32 (si usa, non si studia, in questo corso). DA COMPRENDERE PIÙ AVANTI: macchine a stati finiti (Lezione 13). Una slide senza etichetta è contesto: una storia, un esempio, una domanda, un esercizio.
 Per il docente: A seguire: Verm1, parte 2: la guida e il cibo. Poi le macchine sequenziali: ciò che qui manca è la memoria.</a:t>
             </a:r>
@@ -1747,7 +1747,7 @@
           <a:p>
             <a:r>
               <a:rPr lang="en-US" dirty="0"/>
-              <a:t>I circuiti digitali sono di due tipi. In un circuito combinatorio le uscite in un dato istante dipendono solo dagli ingressi in quello stesso istante: non c'è memoria né retroazione, e una tabella di verità descrive completamente il circuito. In un circuito sequenziale le uscite dipendono anche dalla storia passata degli ingressi: servono le nozioni di tempo e di stato. Sommatori, decodificatori e multiplexer sono combinatori; flip-flop, registri e il processore nel suo insieme sono sequenziali, e sono l'argomento della Lezione 13.
+              <a:t>I circuiti digitali si dividono in due classi. In un circuito combinatorio le uscite in un dato istante dipendono solo dagli ingressi in quello stesso istante: non c'è né memoria né retroazione, e una tavola di verità descrive completamente il circuito. In un circuito sequenziale le uscite dipendono anche dalla storia degli ingressi, quindi servono le nozioni di tempo e di stato. Sommatori, decoder e multiplexer sono combinatori; flip-flop, registri e il processore nel suo insieme sono sequenziali, e sono l'argomento della Lezione 13.
 DA COMPRENDERE OGGI: le reti combinatorie. DA COMPRENDERE PIÙ AVANTI: macchine a stati finiti (si studia nella Lezione 13).
 Per il docente: In inglese: combinational e sequential circuits. La definizione di circuito sequenziale implica tempo e stato: entrambi sono l'argomento della prossima lezione.</a:t>
             </a:r>
@@ -1837,7 +1837,7 @@
           <a:p>
             <a:r>
               <a:rPr lang="en-US" dirty="0"/>
-              <a:t>Una porta reale non risponde all'istante: la sua uscita si assesta dopo un ritardo di propagazione, come ha spiegato la Lezione 10. Il ritardo di una rete è quello del suo percorso più lento da un ingresso a un'uscita, il percorso critico. Mentre i segnali viaggiano le uscite possono essere temporaneamente sbagliate. Quindi una macchina combinatoria è corretta solo dopo essersi assestata, e qualcosa deve dire quando guardarne le uscite. Quel qualcosa è il clock, ed è lì che cominciano le macchine sequenziali.
+              <a:t>Una porta fisica non risponde istantaneamente: la sua uscita si assesta dopo un ritardo di propagazione, la cui origine è stata spiegata nella Lezione 10. Il ritardo di una rete è quello del suo cammino più lento da un ingresso a un'uscita, il cammino critico. Mentre i segnali si propagano, le uscite possono essere temporaneamente errate. Una macchina combinatoria è quindi corretta solo dopo essersi assestata, e qualche meccanismo deve indicare quando le sue uscite si possono campionare. Quel meccanismo è il clock, e con esso comincia lo studio delle macchine sequenziali.
 DA COMPRENDERE OGGI: le reti combinatorie.
 Per il docente: In un sommatore a propagazione del riporto (Lezione 09) il percorso critico attraversa tutti e trentadue i sommatori completi. Il periodo di clock di un processore deve essere più lungo del suo percorso critico più lungo.</a:t>
             </a:r>
@@ -1927,7 +1927,7 @@
           <a:p>
             <a:r>
               <a:rPr lang="en-US" dirty="0"/>
-              <a:t>Un codice associa a ogni elemento di un insieme di N elementi una stringa di simboli, la parola codice. In un codice a lunghezza fissa tutte le parole hanno la stessa lunghezza m. Con un alfabeto di k simboli le parole sono k alla m, quindi m deve essere almeno il logaritmo di N, arrotondato per eccesso. In binario: quattordici voti richiedono 4 bit, e i 32 registri di RISC-V ne richiedono esattamente 5. Quando N non è una potenza di due alcune parole restano inutilizzate, e il codice è incompleto.
+              <a:t>Un codice associa a ogni elemento di un insieme di N elementi una stringa di simboli, la sua parola di codice. In un codice a lunghezza fissa ogni parola ha la stessa lunghezza m. Con un alfabeto di k simboli ci sono k^m parole, quindi m deve essere almeno il logaritmo in base k di N, arrotondato per eccesso. In binario quattordici elementi richiedono 4 bit, e i 32 registri di RISC-V ne richiedono esattamente 5, ed è per questo che ogni campo registro di un'istruzione è largo cinque bit. Quando N non è una potenza di due alcune parole restano inutilizzate, e il codice è incompleto.
 DA COMPRENDERE OGGI: i codici.
 Per il docente: In inglese: fixed-length code. I cinque bit di un numero di registro sono i campi rd, rs1 e rs2 di un'istruzione RISC-V (Lezione 02). Quattordici voti lasciano 16 - 14 = 2 parole non assegnate.</a:t>
             </a:r>
@@ -2017,7 +2017,7 @@
           <a:p>
             <a:r>
               <a:rPr lang="en-US" dirty="0"/>
-              <a:t>Il classico codice incompleto: le cifre decimali su quattro bit. Nel BCD 8421 ogni cifra è semplicemente il suo valore in binario; nell'eccesso 3 il valore è aumentato di tre. Dieci cifre richiedono quattro bit, e quattro bit danno sedici parole, quindi sei non si usano mai: nel BCD, le parole da 1010 a 1111. Ricordate la didascalia: quando si progetta un circuito che riceve cifre BCD, quelle sei parole sono indifferenze e semplificano il circuito.
+              <a:t>Il classico codice incompleto: le cifre decimali su quattro bit. Nel BCD 8421 ogni cifra è semplicemente il suo valore in binario; nell'eccesso 3 il valore è aumentato di tre. Dieci cifre richiedono quattro bit, e quattro bit danno sedici parole, quindi sei non si usano mai: nel BCD, le parole da 1010 a 1111. La didascalia ne trae la conseguenza di progetto: in un circuito che riceve cifre BCD quelle sei parole sono condizioni di indifferenza, e sfruttarle semplifica il circuito.
 DA COMPRENDERE OGGI: i codici.
 Per il docente: Dieci cifre richiedono ceil(log2 10) = 4 bit; sei delle sedici parole non si usano mai: nel BCD 8421 sono da 1010 a 1111. Le parole non usate diventano condizioni di indifferenza quando si progetta un circuito (Lezione 09).</a:t>
             </a:r>
@@ -2107,7 +2107,7 @@
           <a:p>
             <a:r>
               <a:rPr lang="en-US" dirty="0"/>
-              <a:t>Un codice ridondante usa più bit del minimo, quindi solo alcune delle parole possibili sono lecite. Se arriva una parola non lecita, qualcosa l'ha alterata lungo il percorso, e l'errore è rilevato. Confrontate i due codici della tabella. Nel Codice 1 ogni parola di 2 bit è lecita: un bit alterato trasforma un elemento in un altro e nessuno se ne accorge. Il Codice 2 aggiunge un terzo bit che rende pari il numero di 1: qualunque bit singolo alterato produce una parola non lecita. La ridondanza è il prezzo pagato per rilevare gli errori.
+              <a:t>Un codice ridondante usa più bit del minimo, così che solo alcune delle parole possibili siano lecite. L'arrivo di una parola non lecita rivela che qualcosa l'ha alterata in transito, e l'errore viene rilevato. I due codici della tabella lo mostrano. Nel Codice 1 ogni parola di 2 bit è lecita, quindi un bit alterato trasforma un elemento in un altro e l'errore passa inosservato. Il Codice 2 aggiunge un terzo bit che rende pari il numero di 1, quindi ogni singolo bit alterato produce una parola non lecita. La ridondanza è il prezzo della rilevazione degli errori.
 DA COMPRENDERE OGGI: i codici.
 Per il docente: La slide originale mostrava la stessa idea con una figura e una diversa scelta delle parole non lecite. Il Codice 2 è il Codice 1 più un bit di parità pari: le macchine di parità vengono più avanti in questa lezione.</a:t>
             </a:r>
@@ -2197,7 +2197,7 @@
           <a:p>
             <a:r>
               <a:rPr lang="en-US" dirty="0"/>
-              <a:t>Nella rappresentazione decodificata ci sono tanti bit quanti elementi, ed esattamente uno vale 1: una linea per elemento. Si dice anche one-hot. È costosa in fili ma immediatamente utilizzabile, perché la linea attiva può accendere direttamente qualcosa. La regola pratica sta nell'ultima riga: si tiene l'informazione in un codice compatto dentro una parola, e la si decodifica dove una scelta va attuata.
+              <a:t>Nella rappresentazione decodificata ci sono tanti bit quanti elementi, ed esattamente uno di essi vale 1: una linea per elemento, uno schema detto anche one-hot. È costosa in fili ma immediatamente utilizzabile, perché la linea attiva può abilitare direttamente l'azione corrispondente. Il principio di progetto è enunciato nell'ultima riga: l'informazione si tiene in un codice compatto dentro una parola, e la si decodifica solo nel punto in cui una scelta deve tradursi in azione. La parola dei pulsanti della Lezione 08 è un esempio della forma decodificata.
 DA COMPRENDERE OGGI: decoder ed encoder.
 Per il docente: Detta anche one-hot. Le sette lampade del laboratorio 06 sono una rappresentazione decodificata del numero di bit; le 32 linee di abilitazione alla scrittura dei registri RISC-V ne sono un'altra.</a:t>
             </a:r>
@@ -2287,7 +2287,7 @@
           <a:p>
             <a:r>
               <a:rPr lang="en-US" dirty="0"/>
-              <a:t>Un decodificatore riceve una parola codice di m bit e attiva l'unica uscita, su 2 alla m, che le corrisponde. La tabella e il circuito mostrano il decodificatore 2-a-4: ogni uscita è un mintermine dei due ingressi, realizzato con una porta AND e, dove serve, con invertitori. Un decodificatore genera quindi tutti i mintermini dei suoi ingressi. Un ingresso di abilitazione, quando vale 0, tiene a 0 tutte le uscite: sarà la chiave per comporre i decodificatori.
+              <a:t>Un decoder riceve una parola di codice di m bit e attiva l'unica uscita, tra 2^m, che le corrisponde. La tabella e il circuito mostrano il decoder da 2 a 4: ogni uscita è un mintermine dei due ingressi, costruito con una porta AND e invertitori dove servono. Un decoder genera quindi tutti i mintermini dei suoi ingressi, e con una porta OR può perciò realizzare qualsiasi loro funzione. Un ingresso di enable, quando vale 0, tiene a 0 tutte le uscite; è la chiave per comporre piccoli decoder in decoder più grandi.
 DA COMPRENDERE OGGI: decoder ed encoder.
 Per il docente: Sintesi del decodificatore 2-a-4 (1 su 4). A è il bit meno significativo. Il simbolo a blocchi è un riquadro con la scritta 1/N.</a:t>
             </a:r>
@@ -3367,7 +3367,7 @@
                 <a:ea typeface="Calibri" pitchFamily="34" charset="-122"/>
                 <a:cs typeface="Calibri" pitchFamily="34" charset="-120"/>
               </a:rPr>
-              <a:t>11-Architettura_dei_Calcolatori-Macchine_Combinatorie-Codice.pptx</a:t>
+              <a:t>11-Architettura_dei_Calcolatori-Macchine_Combinatorie-Lab.pptx</a:t>
             </a:r>
             <a:endParaRPr lang="en-US" sz="1300" dirty="0"/>
           </a:p>

--- a/it/slides/11-Architettura_dei_Calcolatori-Macchine_Combinatorie.pptx
+++ b/it/slides/11-Architettura_dei_Calcolatori-Macchine_Combinatorie.pptx
@@ -126,26 +126,26 @@
   <p:extLst>
     <p:ext uri="{521415D9-36F7-43E2-AB2F-B90AF26B5E84}">
       <p14:sectionLst xmlns:p14="http://schemas.microsoft.com/office/powerpoint/2010/main">
-        <p14:section name="Apertura" id="{57e5ecfe-13e3-f5a9-40f1-37093b84a767}">
+        <p14:section name="Apertura" id="{1f3e9931-bbfa-e7a6-72e6-e70bb95d39d5}">
           <p14:sldIdLst>
             <p14:sldId id="256"/>
             <p14:sldId id="257"/>
           </p14:sldIdLst>
         </p14:section>
-        <p14:section name="Macchine combinatorie" id="{0d55698b-eeb4-c2f0-b0e8-f44cc7262a1a}">
+        <p14:section name="Macchine combinatorie" id="{2eef6014-2aaa-976d-152a-b7412f29e397}">
           <p14:sldIdLst>
             <p14:sldId id="258"/>
             <p14:sldId id="259"/>
           </p14:sldIdLst>
         </p14:section>
-        <p14:section name="Codici" id="{c093971d-c80c-b0c9-ee7f-0dac767d49f0}">
+        <p14:section name="Codici" id="{2c68438c-2b3a-9d76-ed97-001e1b1e7504}">
           <p14:sldIdLst>
             <p14:sldId id="260"/>
             <p14:sldId id="261"/>
             <p14:sldId id="262"/>
           </p14:sldIdLst>
         </p14:section>
-        <p14:section name="Decodificatori e codificatori" id="{04454fe1-2945-d76b-c163-546a4d75aec1}">
+        <p14:section name="Decodificatori e codificatori" id="{ab674ef9-9ada-b699-c3f5-d3bb51f14cf7}">
           <p14:sldIdLst>
             <p14:sldId id="263"/>
             <p14:sldId id="264"/>
@@ -153,19 +153,19 @@
             <p14:sldId id="266"/>
           </p14:sldIdLst>
         </p14:section>
-        <p14:section name="Multiplexer e demultiplexer" id="{1085edec-10d3-4da0-a361-6a13012d5b79}">
+        <p14:section name="Multiplexer e demultiplexer" id="{7fa63388-cee3-e9de-ebbd-d9279e0127be}">
           <p14:sldIdLst>
             <p14:sldId id="267"/>
             <p14:sldId id="268"/>
           </p14:sldIdLst>
         </p14:section>
-        <p14:section name="Confrontare e controllare" id="{50d0e1de-fe6f-e09c-c4cf-5f5e63a1bb4e}">
+        <p14:section name="Confrontare e controllare" id="{d7f0822f-88c0-7f58-dae8-46b9a3ea0f42}">
           <p14:sldIdLst>
             <p14:sldId id="269"/>
             <p14:sldId id="270"/>
           </p14:sldIdLst>
         </p14:section>
-        <p14:section name="L'unità aritmetico-logica" id="{a7e28e75-14e8-fb1e-3eb8-7ebf29195c6d}">
+        <p14:section name="L'unità aritmetico-logica" id="{61e9bb25-77d6-c48a-6790-29250e5e1bc8}">
           <p14:sldIdLst>
             <p14:sldId id="271"/>
             <p14:sldId id="272"/>

--- a/it/slides/11-Architettura_dei_Calcolatori-Macchine_Combinatorie.pptx
+++ b/it/slides/11-Architettura_dei_Calcolatori-Macchine_Combinatorie.pptx
@@ -126,26 +126,26 @@
   <p:extLst>
     <p:ext uri="{521415D9-36F7-43E2-AB2F-B90AF26B5E84}">
       <p14:sectionLst xmlns:p14="http://schemas.microsoft.com/office/powerpoint/2010/main">
-        <p14:section name="Apertura" id="{1f3e9931-bbfa-e7a6-72e6-e70bb95d39d5}">
+        <p14:section name="Apertura" id="{00acc6b5-99b0-dae4-ecb1-9bccfc19439a}">
           <p14:sldIdLst>
             <p14:sldId id="256"/>
             <p14:sldId id="257"/>
           </p14:sldIdLst>
         </p14:section>
-        <p14:section name="Macchine combinatorie" id="{2eef6014-2aaa-976d-152a-b7412f29e397}">
+        <p14:section name="Macchine combinatorie" id="{e75684cd-8eb2-85d5-7d29-bb87047554aa}">
           <p14:sldIdLst>
             <p14:sldId id="258"/>
             <p14:sldId id="259"/>
           </p14:sldIdLst>
         </p14:section>
-        <p14:section name="Codici" id="{2c68438c-2b3a-9d76-ed97-001e1b1e7504}">
+        <p14:section name="Codici" id="{334309c4-3538-df0e-029c-aef01a2b8893}">
           <p14:sldIdLst>
             <p14:sldId id="260"/>
             <p14:sldId id="261"/>
             <p14:sldId id="262"/>
           </p14:sldIdLst>
         </p14:section>
-        <p14:section name="Decodificatori e codificatori" id="{ab674ef9-9ada-b699-c3f5-d3bb51f14cf7}">
+        <p14:section name="Decodificatori e codificatori" id="{d0bd36f1-a238-fd63-e575-ff8276cedc3d}">
           <p14:sldIdLst>
             <p14:sldId id="263"/>
             <p14:sldId id="264"/>
@@ -153,19 +153,19 @@
             <p14:sldId id="266"/>
           </p14:sldIdLst>
         </p14:section>
-        <p14:section name="Multiplexer e demultiplexer" id="{7fa63388-cee3-e9de-ebbd-d9279e0127be}">
+        <p14:section name="Multiplexer e demultiplexer" id="{c99eb915-8aff-0f90-1455-774af638ed79}">
           <p14:sldIdLst>
             <p14:sldId id="267"/>
             <p14:sldId id="268"/>
           </p14:sldIdLst>
         </p14:section>
-        <p14:section name="Confrontare e controllare" id="{d7f0822f-88c0-7f58-dae8-46b9a3ea0f42}">
+        <p14:section name="Confrontare e controllare" id="{ac1f5ede-7f24-7c27-44d9-c2adaaf60995}">
           <p14:sldIdLst>
             <p14:sldId id="269"/>
             <p14:sldId id="270"/>
           </p14:sldIdLst>
         </p14:section>
-        <p14:section name="L'unità aritmetico-logica" id="{61e9bb25-77d6-c48a-6790-29250e5e1bc8}">
+        <p14:section name="L'unità aritmetico-logica" id="{b6559cd3-d250-a1ef-f4d1-4a1b0e67fe99}">
           <p14:sldIdLst>
             <p14:sldId id="271"/>
             <p14:sldId id="272"/>
@@ -581,6 +581,8 @@
               <a:t>Le lezioni precedenti hanno fornito le porte e un metodo per combinarle. Questa è un catalogo delle macchine combinatorie standard con cui i progettisti costruiscono davvero i sistemi: decoder, encoder, multiplexer, comparatori, reti di parità, e infine l'unità aritmetico-logica. Per ciascuna la lezione stabilisce che cosa calcola, come si costruisce e dove si trova dentro un processore RISC-V. Il giovane Turing della citazione pretende che carote e piselli restino separati; anche questa lezione parla di tenere distinti i segnali e di scegliere tra di essi.
 Stato di apprendimento: DA COMPRENDERE OGGI, alla fine di questa lezione lo spiegate, lo seguite passo passo e lo applicate da soli; DA UTILIZZARE OGGI, oggi seguite e usate la ricetta; come funziona dentro si spiega più avanti, o non fa parte del corso; DA COMPRENDERE PIÙ AVANTI, riconoscete il nome e lo scopo; lo spiega una lezione successiva. Una slide senza etichetta è contesto: una storia, un esempio, una domanda, un esercizio.
 Stato di apprendimento di questa lezione. DA COMPRENDERE OGGI: i multiplexer; le reti combinatorie; i codici; decoder ed encoder; comparatori e parità; l'ALU. DA UTILIZZARE OGGI: il programma completo, gli strumenti di PRG32 (si usa, non si studia, in questo corso). DA COMPRENDERE PIÙ AVANTI: macchine a stati finiti (Lezione 13). Una slide senza etichetta è contesto: una storia, un esempio, una domanda, un esercizio.
+Percorso. I risultati di oggi: (1) distinguere una macchina combinatoria da una sequenziale; (2) usare decodificatori, multiplexer, comparatori e parità; (3) spiegare l'ALU come unità in parallelo e un multiplexer. Si appoggia su: solo ciò che ha preparato la Lezione 01. Prossimo passo: Lezione 12, Verm1, parte 2: la guida, il cibo e un punteggio.
+Ponte. Nella Lezione 02 un'istruzione era un numero a 32 bit, e il processore in qualche modo sapeva che cosa farne. Oggi un decodificatore legge un campo di quel numero, funct3, e pilota il multiplexer che sceglie il risultato dell'ALU. La Lezione 19 descrive tutti i campi e il ciclo di prelievo, decodifica, esecuzione. Richiamo: Quale parte della parola di un'istruzione dice all'ALU di sommare invece di calcolare un AND?
 Per il docente: Spirale: una ricerca in tabella in assembly è un multiplexer; la lezione costruisce poi i blocchi combinatori standard e mostra dove sta ciascuno dentro un processore RISC-V (il corso degli anni precedenti usava come riferimento il Motorola 68000).</a:t>
             </a:r>
             <a:endParaRPr lang="en-US" dirty="0"/>
@@ -1658,7 +1660,7 @@
             <a:r>
               <a:rPr lang="en-US" dirty="0"/>
               <a:t>Cinque conclusioni. Un codice scrive ogni elemento di un insieme come stringa di simboli, la sua parola di codice. Un codice binario a lunghezza fissa richiede log2 N bit arrotondato per eccesso, e un codice ridondante spende bit in più per rilevare errori. Codifica, decodifica e transcodifica sono svolte da macchine combinatorie. I multiplexer scelgono una sorgente, i demultiplexer una destinazione, mentre comparatori e reti di parità verificano. Il processore le impiega tutte. A queste macchine manca la memoria: dopo la Parte 2 di Verm1, la Lezione 13 la fornisce.
-Stato di apprendimento, riepilogo. DA COMPRENDERE OGGI: i multiplexer; le reti combinatorie; i codici; decoder ed encoder; comparatori e parità; l'ALU. DA UTILIZZARE OGGI: il programma completo, gli strumenti di PRG32 (si usa, non si studia, in questo corso). DA COMPRENDERE PIÙ AVANTI: macchine a stati finiti (Lezione 13). Una slide senza etichetta è contesto: una storia, un esempio, una domanda, un esercizio.
+Stato di apprendimento, riepilogo. DA COMPRENDERE OGGI: i multiplexer; le reti combinatorie; i codici; decoder ed encoder; comparatori e parità; l'ALU. DA UTILIZZARE OGGI: il programma completo, gli strumenti di PRG32 (si usa, non si studia, in questo corso). DA COMPRENDERE PIÙ AVANTI: macchine a stati finiti (Lezione 13). Una slide senza etichetta è contesto: una storia, un esempio, una domanda, un esercizio. Il filo della lezione: L'ALU che ha eseguito ogni add finora è una grande macchina combinatoria: molti risultati calcolati insieme, uno scelto. Prossimo passo: questi circuiti al lavoro nella seconda parte di Verm1. Biglietto d'uscita (da due a quattro minuti, da soli, su carta): 1. Combinatoria o sequenziale: un sommatore; un contatore di pressioni di un pulsante; un multiplexer; il processore nel suo insieme? Enunciate la regola usata. 2. L'ALU calcola insieme la somma, l'AND, l'OR, lo XOR e uno scorrimento delle stesse due parole. Come arriva in t2 solo il risultato di add t2, t0, t1, e chi lo sceglie?
 Per il docente: A seguire: Verm1, parte 2: la guida e il cibo. Poi le macchine sequenziali: ciò che qui manca è la memoria.</a:t>
             </a:r>
             <a:endParaRPr lang="en-US" dirty="0"/>
